--- a/courses/ai-native/sessions/references.pptx
+++ b/courses/ai-native/sessions/references.pptx
@@ -561,6 +561,48 @@
             <a:r>
               <a:rPr lang="ko-KR" sz="1200"/>
               <a:t>[Blount 외 2026]은 Kaggle에서 받은 PDF(references/inputs/Google_IntroductionToAgents.pdf, "Updated May 2026" 판)로 확인했다. 첫 판은 2025년 11월이며 판이 바뀌면 다시 확인한다. 공개 URL은 로그인이 필요해 적지 않았다.</a:t>
+            </a:r>
+          </a:p>
+          <a:p>
+            <a:pPr lvl="0"/>
+            <a:r>
+              <a:rPr lang="ko-KR" sz="1200"/>
+              <a:t>[Meyer 1992]는 3단 스캔본이라 자동 대조가 되지 않아 지면을 직접 읽어 문장과 문장부호를 확인했다(2026-10-14). 같은 저자의 *Object-Oriented Software Construction*(1997)은 확보하지 못해 목록에 두지 않는다.</a:t>
+            </a:r>
+          </a:p>
+          <a:p>
+            <a:pPr lvl="0"/>
+            <a:r>
+              <a:rPr lang="ko-KR" sz="1200"/>
+              <a:t>[Wirfs-Brock 2006]은 저자의 강연 자료다. 책 *Object Design: Roles, Responsibilities, and Collaborations*(Wirfs-Brock·McKean, 2003)의 본문은 확인하지 못해 강연 자료를 출처로 쓴다.</a:t>
+            </a:r>
+          </a:p>
+          <a:p>
+            <a:pPr lvl="0"/>
+            <a:r>
+              <a:rPr lang="ko-KR" sz="1200"/>
+              <a:t>[Chen 1976]은 2026-10-24에 목록의 알파벳 순서 자리로 옮겼다. 그 전에는 강사 노트 뒤에 번호만 이어 붙어 있었다.</a:t>
+            </a:r>
+          </a:p>
+          <a:p>
+            <a:pPr lvl="0"/>
+            <a:r>
+              <a:rPr lang="ko-KR" sz="1200"/>
+              <a:t>[Gao 외 2025]·[Hassan 외 2026]은 받은 PDF(references/inputs/)로 확인하고 원문을 references/sources/gao-2025-llm4se-challenges.txt·hassan-2026-se30.txt에 추출해 두었다(2026-10-27). 둘 다 ACM Transactions on Software Engineering and Methodology 게재 논문이다.</a:t>
+            </a:r>
+          </a:p>
+          <a:p>
+            <a:pPr lvl="0"/>
+            <a:r>
+              <a:rPr lang="ko-KR" sz="1200"/>
+              <a:t>[Hassan 외 2026]은 비전·로드맵 논문이다. SE 1.0·2.0·3.0의 구분과 SE 2.0의 한계 진단만 쓰고, 제안한 기술 스택과 코드를 사람에게 감춘다는 입장은 쓰지 않는다(course-design.md의 「원전 적용 결정」).</a:t>
+            </a:r>
+          </a:p>
+          <a:p>
+            <a:pPr lvl="0"/>
+            <a:r>
+              <a:rPr lang="ko-KR" sz="1200"/>
+              <a:t>[Gao 외 2025]의 데이터 구축·모델 학습·취약점 데이터 항목은 범위 밖이다. 요구와 설계, 테스트 생성의 난제만 쓴다.</a:t>
             </a:r>
           </a:p>
         </p:txBody>
@@ -2301,6 +2343,57 @@
                 <a:latin typeface="맑은 고딕"/>
                 <a:ea typeface="맑은 고딕"/>
               </a:rPr>
+              <a:t>[Anthropic: Prompt caching]</a:t>
+            </a:r>
+            <a:r>
+              <a:rPr sz="800" b="0">
+                <a:solidFill>
+                  <a:srgbClr val="000000"/>
+                </a:solidFill>
+                <a:latin typeface="맑은 고딕"/>
+                <a:ea typeface="맑은 고딕"/>
+              </a:rPr>
+              <a:t>  Prompt caching, Anthropic, https://platform.claude.com/docs/en/docs/build-with-claude/prompt-caching </a:t>
+            </a:r>
+            <a:r>
+              <a:rPr sz="800" b="0">
+                <a:solidFill>
+                  <a:srgbClr val="000000"/>
+                </a:solidFill>
+                <a:latin typeface="맑은 고딕"/>
+                <a:ea typeface="맑은 고딕"/>
+              </a:rPr>
+              <a:t>(2026-10 확인)</a:t>
+            </a:r>
+          </a:p>
+          <a:p>
+            <a:pPr lvl="2" marL="167640" indent="-167640">
+              <a:spcBef>
+                <a:spcPts val="100"/>
+              </a:spcBef>
+              <a:spcAft>
+                <a:spcPts val="100"/>
+              </a:spcAft>
+              <a:buNone/>
+            </a:pPr>
+            <a:r>
+              <a:rPr sz="800" b="0">
+                <a:solidFill>
+                  <a:srgbClr val="000000"/>
+                </a:solidFill>
+                <a:latin typeface="맑은 고딕"/>
+                <a:ea typeface="맑은 고딕"/>
+              </a:rPr>
+              <a:t>11. </a:t>
+            </a:r>
+            <a:r>
+              <a:rPr sz="800" b="1">
+                <a:solidFill>
+                  <a:srgbClr val="000000"/>
+                </a:solidFill>
+                <a:latin typeface="맑은 고딕"/>
+                <a:ea typeface="맑은 고딕"/>
+              </a:rPr>
               <a:t>[Beck 2025]</a:t>
             </a:r>
             <a:r>
@@ -2312,6 +2405,98 @@
                 <a:ea typeface="맑은 고딕"/>
               </a:rPr>
               <a:t>  Augmented Coding: Beyond the Vibes, Kent Beck, 2025, https://newsletter.kentbeck.com/p/augmented-coding-beyond-the-vibes</a:t>
+            </a:r>
+          </a:p>
+          <a:p>
+            <a:pPr lvl="2" marL="167640" indent="-167640">
+              <a:spcBef>
+                <a:spcPts val="100"/>
+              </a:spcBef>
+              <a:spcAft>
+                <a:spcPts val="100"/>
+              </a:spcAft>
+              <a:buNone/>
+            </a:pPr>
+            <a:r>
+              <a:rPr sz="800" b="0">
+                <a:solidFill>
+                  <a:srgbClr val="000000"/>
+                </a:solidFill>
+                <a:latin typeface="맑은 고딕"/>
+                <a:ea typeface="맑은 고딕"/>
+              </a:rPr>
+              <a:t>12. </a:t>
+            </a:r>
+            <a:r>
+              <a:rPr sz="800" b="1">
+                <a:solidFill>
+                  <a:srgbClr val="000000"/>
+                </a:solidFill>
+                <a:latin typeface="맑은 고딕"/>
+                <a:ea typeface="맑은 고딕"/>
+              </a:rPr>
+              <a:t>[Blount 외 2026]</a:t>
+            </a:r>
+            <a:r>
+              <a:rPr sz="800" b="0">
+                <a:solidFill>
+                  <a:srgbClr val="000000"/>
+                </a:solidFill>
+                <a:latin typeface="맑은 고딕"/>
+                <a:ea typeface="맑은 고딕"/>
+              </a:rPr>
+              <a:t>  Introduction to Agents, Alan Blount·Antonio Gulli·Shubham Saboo·Michael Zimmermann·Vladimir Vuskovic, Google, 2026</a:t>
+            </a:r>
+          </a:p>
+          <a:p>
+            <a:pPr lvl="2" marL="167640" indent="-167640">
+              <a:spcBef>
+                <a:spcPts val="100"/>
+              </a:spcBef>
+              <a:spcAft>
+                <a:spcPts val="100"/>
+              </a:spcAft>
+              <a:buNone/>
+            </a:pPr>
+            <a:r>
+              <a:rPr sz="800" b="0">
+                <a:solidFill>
+                  <a:srgbClr val="000000"/>
+                </a:solidFill>
+                <a:latin typeface="맑은 고딕"/>
+                <a:ea typeface="맑은 고딕"/>
+              </a:rPr>
+              <a:t>13. </a:t>
+            </a:r>
+            <a:r>
+              <a:rPr sz="800" b="1">
+                <a:solidFill>
+                  <a:srgbClr val="000000"/>
+                </a:solidFill>
+                <a:latin typeface="맑은 고딕"/>
+                <a:ea typeface="맑은 고딕"/>
+              </a:rPr>
+              <a:t>[Brooks 1986]</a:t>
+            </a:r>
+            <a:r>
+              <a:rPr sz="800" b="0">
+                <a:solidFill>
+                  <a:srgbClr val="000000"/>
+                </a:solidFill>
+                <a:latin typeface="맑은 고딕"/>
+                <a:ea typeface="맑은 고딕"/>
+              </a:rPr>
+              <a:t>  No Silver Bullet —</a:t>
+            </a:r>
+            <a:r>
+              <a:rPr sz="800" b="0">
+                <a:solidFill>
+                  <a:srgbClr val="000000"/>
+                </a:solidFill>
+                <a:latin typeface="맑은 고딕"/>
+                <a:ea typeface="맑은 고딕"/>
+              </a:rPr>
+              <a:t> Essence and Accidents of Software Engineering, Frederick P. Brooks Jr., UNC Technical Report TR86-020, 1986, https://www.cs.unc.edu/techreports/86-020.pdf</a:t>
             </a:r>
           </a:p>
         </p:txBody>
@@ -2361,7 +2546,7 @@
                 <a:latin typeface="맑은 고딕"/>
                 <a:ea typeface="맑은 고딕"/>
               </a:rPr>
-              <a:t>11. </a:t>
+              <a:t>14. </a:t>
             </a:r>
             <a:r>
               <a:rPr sz="800" b="1">
@@ -2371,17 +2556,17 @@
                 <a:latin typeface="맑은 고딕"/>
                 <a:ea typeface="맑은 고딕"/>
               </a:rPr>
-              <a:t>[Blount 외 2026]</a:t>
-            </a:r>
-            <a:r>
-              <a:rPr sz="800" b="0">
-                <a:solidFill>
-                  <a:srgbClr val="000000"/>
-                </a:solidFill>
-                <a:latin typeface="맑은 고딕"/>
-                <a:ea typeface="맑은 고딕"/>
-              </a:rPr>
-              <a:t>  Introduction to Agents, Alan Blount·Antonio Gulli·Shubham Saboo·Michael Zimmermann·Vladimir Vuskovic, Google, 2026</a:t>
+              <a:t>[Böckeler 2025]</a:t>
+            </a:r>
+            <a:r>
+              <a:rPr sz="800" b="0">
+                <a:solidFill>
+                  <a:srgbClr val="000000"/>
+                </a:solidFill>
+                <a:latin typeface="맑은 고딕"/>
+                <a:ea typeface="맑은 고딕"/>
+              </a:rPr>
+              <a:t>  Understanding Spec-Driven-Development: Kiro, spec-kit, and Tessl, Birgitta Böckeler, martinfowler.com, 2025, https://martinfowler.com/articles/exploring-gen-ai/sdd-3-tools.html</a:t>
             </a:r>
           </a:p>
           <a:p>
@@ -2402,7 +2587,7 @@
                 <a:latin typeface="맑은 고딕"/>
                 <a:ea typeface="맑은 고딕"/>
               </a:rPr>
-              <a:t>12. </a:t>
+              <a:t>15. </a:t>
             </a:r>
             <a:r>
               <a:rPr sz="800" b="1">
@@ -2412,17 +2597,17 @@
                 <a:latin typeface="맑은 고딕"/>
                 <a:ea typeface="맑은 고딕"/>
               </a:rPr>
-              <a:t>[Böckeler 2025]</a:t>
-            </a:r>
-            <a:r>
-              <a:rPr sz="800" b="0">
-                <a:solidFill>
-                  <a:srgbClr val="000000"/>
-                </a:solidFill>
-                <a:latin typeface="맑은 고딕"/>
-                <a:ea typeface="맑은 고딕"/>
-              </a:rPr>
-              <a:t>  Understanding Spec-Driven-Development: Kiro, spec-kit, and Tessl, Birgitta Böckeler, martinfowler.com, 2025, https://martinfowler.com/articles/exploring-gen-ai/sdd-3-tools.html</a:t>
+              <a:t>[Böckeler 2026a]</a:t>
+            </a:r>
+            <a:r>
+              <a:rPr sz="800" b="0">
+                <a:solidFill>
+                  <a:srgbClr val="000000"/>
+                </a:solidFill>
+                <a:latin typeface="맑은 고딕"/>
+                <a:ea typeface="맑은 고딕"/>
+              </a:rPr>
+              <a:t>  Harness engineering for coding agent users, Birgitta Böckeler, martinfowler.com, 2026, https://martinfowler.com/articles/exploring-gen-ai/harness-engineering.html</a:t>
             </a:r>
           </a:p>
           <a:p>
@@ -2443,7 +2628,7 @@
                 <a:latin typeface="맑은 고딕"/>
                 <a:ea typeface="맑은 고딕"/>
               </a:rPr>
-              <a:t>13. </a:t>
+              <a:t>16. </a:t>
             </a:r>
             <a:r>
               <a:rPr sz="800" b="1">
@@ -2453,17 +2638,17 @@
                 <a:latin typeface="맑은 고딕"/>
                 <a:ea typeface="맑은 고딕"/>
               </a:rPr>
-              <a:t>[Böckeler 2026a]</a:t>
-            </a:r>
-            <a:r>
-              <a:rPr sz="800" b="0">
-                <a:solidFill>
-                  <a:srgbClr val="000000"/>
-                </a:solidFill>
-                <a:latin typeface="맑은 고딕"/>
-                <a:ea typeface="맑은 고딕"/>
-              </a:rPr>
-              <a:t>  Harness engineering for coding agent users, Birgitta Böckeler, martinfowler.com, 2026, https://martinfowler.com/articles/exploring-gen-ai/harness-engineering.html</a:t>
+              <a:t>[Böckeler 2026b]</a:t>
+            </a:r>
+            <a:r>
+              <a:rPr sz="800" b="0">
+                <a:solidFill>
+                  <a:srgbClr val="000000"/>
+                </a:solidFill>
+                <a:latin typeface="맑은 고딕"/>
+                <a:ea typeface="맑은 고딕"/>
+              </a:rPr>
+              <a:t>  Maintainability sensors for coding agents, Birgitta Böckeler, martinfowler.com, 2026, https://martinfowler.com/articles/sensors-for-coding-agents.html</a:t>
             </a:r>
           </a:p>
           <a:p>
@@ -2484,7 +2669,7 @@
                 <a:latin typeface="맑은 고딕"/>
                 <a:ea typeface="맑은 고딕"/>
               </a:rPr>
-              <a:t>14. </a:t>
+              <a:t>17. </a:t>
             </a:r>
             <a:r>
               <a:rPr sz="800" b="1">
@@ -2494,17 +2679,27 @@
                 <a:latin typeface="맑은 고딕"/>
                 <a:ea typeface="맑은 고딕"/>
               </a:rPr>
-              <a:t>[Böckeler 2026b]</a:t>
-            </a:r>
-            <a:r>
-              <a:rPr sz="800" b="0">
-                <a:solidFill>
-                  <a:srgbClr val="000000"/>
-                </a:solidFill>
-                <a:latin typeface="맑은 고딕"/>
-                <a:ea typeface="맑은 고딕"/>
-              </a:rPr>
-              <a:t>  Maintainability sensors for coding agents, Birgitta Böckeler, martinfowler.com, 2026, https://martinfowler.com/articles/sensors-for-coding-agents.html</a:t>
+              <a:t>[Chen 1976]</a:t>
+            </a:r>
+            <a:r>
+              <a:rPr sz="800" b="0">
+                <a:solidFill>
+                  <a:srgbClr val="000000"/>
+                </a:solidFill>
+                <a:latin typeface="맑은 고딕"/>
+                <a:ea typeface="맑은 고딕"/>
+              </a:rPr>
+              <a:t>  The Entity-Relationship Model —</a:t>
+            </a:r>
+            <a:r>
+              <a:rPr sz="800" b="0">
+                <a:solidFill>
+                  <a:srgbClr val="000000"/>
+                </a:solidFill>
+                <a:latin typeface="맑은 고딕"/>
+                <a:ea typeface="맑은 고딕"/>
+              </a:rPr>
+              <a:t> Toward a Unified View of Data, Peter Pin-Shan Chen, ACM Transactions on Database Systems, 1976, https://www.csc.lsu.edu/~chen/pdf/erd-5-pages.pdf</a:t>
             </a:r>
           </a:p>
           <a:p>
@@ -2525,7 +2720,7 @@
                 <a:latin typeface="맑은 고딕"/>
                 <a:ea typeface="맑은 고딕"/>
               </a:rPr>
-              <a:t>15. </a:t>
+              <a:t>18. </a:t>
             </a:r>
             <a:r>
               <a:rPr sz="800" b="1">
@@ -2535,27 +2730,17 @@
                 <a:latin typeface="맑은 고딕"/>
                 <a:ea typeface="맑은 고딕"/>
               </a:rPr>
-              <a:t>[Brooks 1986]</a:t>
-            </a:r>
-            <a:r>
-              <a:rPr sz="800" b="0">
-                <a:solidFill>
-                  <a:srgbClr val="000000"/>
-                </a:solidFill>
-                <a:latin typeface="맑은 고딕"/>
-                <a:ea typeface="맑은 고딕"/>
-              </a:rPr>
-              <a:t>  No Silver Bullet —</a:t>
-            </a:r>
-            <a:r>
-              <a:rPr sz="800" b="0">
-                <a:solidFill>
-                  <a:srgbClr val="000000"/>
-                </a:solidFill>
-                <a:latin typeface="맑은 고딕"/>
-                <a:ea typeface="맑은 고딕"/>
-              </a:rPr>
-              <a:t> Essence and Accidents of Software Engineering, Frederick P. Brooks Jr., UNC Technical Report TR86-020, 1986, https://www.cs.unc.edu/techreports/86-020.pdf</a:t>
+              <a:t>[Cockburn 2005]</a:t>
+            </a:r>
+            <a:r>
+              <a:rPr sz="800" b="0">
+                <a:solidFill>
+                  <a:srgbClr val="000000"/>
+                </a:solidFill>
+                <a:latin typeface="맑은 고딕"/>
+                <a:ea typeface="맑은 고딕"/>
+              </a:rPr>
+              <a:t>  Hexagonal architecture, Alistair Cockburn, 2005, https://alistair.cockburn.us/hexagonal-architecture/</a:t>
             </a:r>
           </a:p>
           <a:p>
@@ -2576,7 +2761,7 @@
                 <a:latin typeface="맑은 고딕"/>
                 <a:ea typeface="맑은 고딕"/>
               </a:rPr>
-              <a:t>16. </a:t>
+              <a:t>19. </a:t>
             </a:r>
             <a:r>
               <a:rPr sz="800" b="1">
@@ -2617,7 +2802,7 @@
                 <a:latin typeface="맑은 고딕"/>
                 <a:ea typeface="맑은 고딕"/>
               </a:rPr>
-              <a:t>17. </a:t>
+              <a:t>20. </a:t>
             </a:r>
             <a:r>
               <a:rPr sz="800" b="1">
@@ -2658,7 +2843,7 @@
                 <a:latin typeface="맑은 고딕"/>
                 <a:ea typeface="맑은 고딕"/>
               </a:rPr>
-              <a:t>18. </a:t>
+              <a:t>21. </a:t>
             </a:r>
             <a:r>
               <a:rPr sz="800" b="1">
@@ -2699,7 +2884,7 @@
                 <a:latin typeface="맑은 고딕"/>
                 <a:ea typeface="맑은 고딕"/>
               </a:rPr>
-              <a:t>19. </a:t>
+              <a:t>22. </a:t>
             </a:r>
             <a:r>
               <a:rPr sz="800" b="1">
@@ -2720,6 +2905,149 @@
                 <a:ea typeface="맑은 고딕"/>
               </a:rPr>
               <a:t>  Domain-Driven Design Reference, Eric Evans, Domain Language, 2015, https://www.domainlanguage.com/wp-content/uploads/2016/05/DDD_Reference_2015-03.pdf</a:t>
+            </a:r>
+          </a:p>
+          <a:p>
+            <a:pPr lvl="2" marL="167640" indent="-167640">
+              <a:spcBef>
+                <a:spcPts val="100"/>
+              </a:spcBef>
+              <a:spcAft>
+                <a:spcPts val="100"/>
+              </a:spcAft>
+              <a:buNone/>
+            </a:pPr>
+            <a:r>
+              <a:rPr sz="800" b="0">
+                <a:solidFill>
+                  <a:srgbClr val="000000"/>
+                </a:solidFill>
+                <a:latin typeface="맑은 고딕"/>
+                <a:ea typeface="맑은 고딕"/>
+              </a:rPr>
+              <a:t>23. </a:t>
+            </a:r>
+            <a:r>
+              <a:rPr sz="800" b="1">
+                <a:solidFill>
+                  <a:srgbClr val="000000"/>
+                </a:solidFill>
+                <a:latin typeface="맑은 고딕"/>
+                <a:ea typeface="맑은 고딕"/>
+              </a:rPr>
+              <a:t>[Fowler 2015c]</a:t>
+            </a:r>
+            <a:r>
+              <a:rPr sz="800" b="0">
+                <a:solidFill>
+                  <a:srgbClr val="000000"/>
+                </a:solidFill>
+                <a:latin typeface="맑은 고딕"/>
+                <a:ea typeface="맑은 고딕"/>
+              </a:rPr>
+              <a:t>  MonolithFirst, Martin Fowler, martinfowler.com, 2015, https://martinfowler.com/bliki/MonolithFirst.html</a:t>
+            </a:r>
+          </a:p>
+          <a:p>
+            <a:pPr lvl="2" marL="167640" indent="-167640">
+              <a:spcBef>
+                <a:spcPts val="100"/>
+              </a:spcBef>
+              <a:spcAft>
+                <a:spcPts val="100"/>
+              </a:spcAft>
+              <a:buNone/>
+            </a:pPr>
+            <a:r>
+              <a:rPr sz="800" b="0">
+                <a:solidFill>
+                  <a:srgbClr val="000000"/>
+                </a:solidFill>
+                <a:latin typeface="맑은 고딕"/>
+                <a:ea typeface="맑은 고딕"/>
+              </a:rPr>
+              <a:t>24. </a:t>
+            </a:r>
+            <a:r>
+              <a:rPr sz="800" b="1">
+                <a:solidFill>
+                  <a:srgbClr val="000000"/>
+                </a:solidFill>
+                <a:latin typeface="맑은 고딕"/>
+                <a:ea typeface="맑은 고딕"/>
+              </a:rPr>
+              <a:t>[Fowler 2025]</a:t>
+            </a:r>
+            <a:r>
+              <a:rPr sz="800" b="0">
+                <a:solidFill>
+                  <a:srgbClr val="000000"/>
+                </a:solidFill>
+                <a:latin typeface="맑은 고딕"/>
+                <a:ea typeface="맑은 고딕"/>
+              </a:rPr>
+              <a:t>  LLMs bring new nature of abstraction, Martin Fowler, martinfowler.com, 2025, https://martinfowler.com/articles/2025-nature-abstraction.html</a:t>
+            </a:r>
+          </a:p>
+          <a:p>
+            <a:pPr lvl="2" marL="167640" indent="-167640">
+              <a:spcBef>
+                <a:spcPts val="100"/>
+              </a:spcBef>
+              <a:spcAft>
+                <a:spcPts val="100"/>
+              </a:spcAft>
+              <a:buNone/>
+            </a:pPr>
+            <a:r>
+              <a:rPr sz="800" b="0">
+                <a:solidFill>
+                  <a:srgbClr val="000000"/>
+                </a:solidFill>
+                <a:latin typeface="맑은 고딕"/>
+                <a:ea typeface="맑은 고딕"/>
+              </a:rPr>
+              <a:t>25. </a:t>
+            </a:r>
+            <a:r>
+              <a:rPr sz="800" b="1">
+                <a:solidFill>
+                  <a:srgbClr val="000000"/>
+                </a:solidFill>
+                <a:latin typeface="맑은 고딕"/>
+                <a:ea typeface="맑은 고딕"/>
+              </a:rPr>
+              <a:t>[Gao 외 2025]</a:t>
+            </a:r>
+            <a:r>
+              <a:rPr sz="800" b="0">
+                <a:solidFill>
+                  <a:srgbClr val="000000"/>
+                </a:solidFill>
+                <a:latin typeface="맑은 고딕"/>
+                <a:ea typeface="맑은 고딕"/>
+              </a:rPr>
+              <a:t>  The Current Challenges of Software Engineering in the Era of Large Language Models, Cuiyun Gao·Xing Hu·Shan Gao·Xin Xia·Zhi Jin, ACM Transactions on Software Engineering and Methodology 34</a:t>
+            </a:r>
+            <a:r>
+              <a:rPr sz="800" b="0">
+                <a:solidFill>
+                  <a:srgbClr val="000000"/>
+                </a:solidFill>
+                <a:latin typeface="맑은 고딕"/>
+                <a:ea typeface="맑은 고딕"/>
+              </a:rPr>
+              <a:t>(5)</a:t>
+            </a:r>
+            <a:r>
+              <a:rPr sz="800" b="0">
+                <a:solidFill>
+                  <a:srgbClr val="000000"/>
+                </a:solidFill>
+                <a:latin typeface="맑은 고딕"/>
+                <a:ea typeface="맑은 고딕"/>
+              </a:rPr>
+              <a:t>, 2025, https://doi.org/10.1145/3712005</a:t>
             </a:r>
           </a:p>
         </p:txBody>
@@ -2962,7 +3290,7 @@
                 <a:latin typeface="맑은 고딕"/>
                 <a:ea typeface="맑은 고딕"/>
               </a:rPr>
-              <a:t>20. </a:t>
+              <a:t>26. </a:t>
             </a:r>
             <a:r>
               <a:rPr sz="800" b="1">
@@ -2972,17 +3300,17 @@
                 <a:latin typeface="맑은 고딕"/>
                 <a:ea typeface="맑은 고딕"/>
               </a:rPr>
-              <a:t>[Fowler 2025]</a:t>
-            </a:r>
-            <a:r>
-              <a:rPr sz="800" b="0">
-                <a:solidFill>
-                  <a:srgbClr val="000000"/>
-                </a:solidFill>
-                <a:latin typeface="맑은 고딕"/>
-                <a:ea typeface="맑은 고딕"/>
-              </a:rPr>
-              <a:t>  LLMs bring new nature of abstraction, Martin Fowler, martinfowler.com, 2025, https://martinfowler.com/articles/2025-nature-abstraction.html</a:t>
+              <a:t>[GitHub Spec Kit]</a:t>
+            </a:r>
+            <a:r>
+              <a:rPr sz="800" b="0">
+                <a:solidFill>
+                  <a:srgbClr val="000000"/>
+                </a:solidFill>
+                <a:latin typeface="맑은 고딕"/>
+                <a:ea typeface="맑은 고딕"/>
+              </a:rPr>
+              <a:t>  Spec Kit, GitHub, https://github.com/github/spec-kit</a:t>
             </a:r>
           </a:p>
           <a:p>
@@ -3003,7 +3331,7 @@
                 <a:latin typeface="맑은 고딕"/>
                 <a:ea typeface="맑은 고딕"/>
               </a:rPr>
-              <a:t>21. </a:t>
+              <a:t>27. </a:t>
             </a:r>
             <a:r>
               <a:rPr sz="800" b="1">
@@ -3013,17 +3341,37 @@
                 <a:latin typeface="맑은 고딕"/>
                 <a:ea typeface="맑은 고딕"/>
               </a:rPr>
-              <a:t>[GitHub Spec Kit]</a:t>
-            </a:r>
-            <a:r>
-              <a:rPr sz="800" b="0">
-                <a:solidFill>
-                  <a:srgbClr val="000000"/>
-                </a:solidFill>
-                <a:latin typeface="맑은 고딕"/>
-                <a:ea typeface="맑은 고딕"/>
-              </a:rPr>
-              <a:t>  Spec Kit, GitHub, https://github.com/github/spec-kit</a:t>
+              <a:t>[Gruber 1993]</a:t>
+            </a:r>
+            <a:r>
+              <a:rPr sz="800" b="0">
+                <a:solidFill>
+                  <a:srgbClr val="000000"/>
+                </a:solidFill>
+                <a:latin typeface="맑은 고딕"/>
+                <a:ea typeface="맑은 고딕"/>
+              </a:rPr>
+              <a:t>  A Translation Approach to Portable Ontology Specifications, Thomas R. Gruber, Knowledge Acquisition 5</a:t>
+            </a:r>
+            <a:r>
+              <a:rPr sz="800" b="0">
+                <a:solidFill>
+                  <a:srgbClr val="000000"/>
+                </a:solidFill>
+                <a:latin typeface="맑은 고딕"/>
+                <a:ea typeface="맑은 고딕"/>
+              </a:rPr>
+              <a:t>(2)</a:t>
+            </a:r>
+            <a:r>
+              <a:rPr sz="800" b="0">
+                <a:solidFill>
+                  <a:srgbClr val="000000"/>
+                </a:solidFill>
+                <a:latin typeface="맑은 고딕"/>
+                <a:ea typeface="맑은 고딕"/>
+              </a:rPr>
+              <a:t>, 1993</a:t>
             </a:r>
           </a:p>
           <a:p>
@@ -3044,7 +3392,7 @@
                 <a:latin typeface="맑은 고딕"/>
                 <a:ea typeface="맑은 고딕"/>
               </a:rPr>
-              <a:t>22. </a:t>
+              <a:t>28. </a:t>
             </a:r>
             <a:r>
               <a:rPr sz="800" b="1">
@@ -3054,37 +3402,87 @@
                 <a:latin typeface="맑은 고딕"/>
                 <a:ea typeface="맑은 고딕"/>
               </a:rPr>
-              <a:t>[Gruber 1993]</a:t>
-            </a:r>
-            <a:r>
-              <a:rPr sz="800" b="0">
-                <a:solidFill>
-                  <a:srgbClr val="000000"/>
-                </a:solidFill>
-                <a:latin typeface="맑은 고딕"/>
-                <a:ea typeface="맑은 고딕"/>
-              </a:rPr>
-              <a:t>  A Translation Approach to Portable Ontology Specifications, Thomas R. Gruber, Knowledge Acquisition 5</a:t>
-            </a:r>
-            <a:r>
-              <a:rPr sz="800" b="0">
-                <a:solidFill>
-                  <a:srgbClr val="000000"/>
-                </a:solidFill>
-                <a:latin typeface="맑은 고딕"/>
-                <a:ea typeface="맑은 고딕"/>
-              </a:rPr>
-              <a:t>(2)</a:t>
-            </a:r>
-            <a:r>
-              <a:rPr sz="800" b="0">
-                <a:solidFill>
-                  <a:srgbClr val="000000"/>
-                </a:solidFill>
-                <a:latin typeface="맑은 고딕"/>
-                <a:ea typeface="맑은 고딕"/>
-              </a:rPr>
-              <a:t>, 1993</a:t>
+              <a:t>[Hassan 외 2026]</a:t>
+            </a:r>
+            <a:r>
+              <a:rPr sz="800" b="0">
+                <a:solidFill>
+                  <a:srgbClr val="000000"/>
+                </a:solidFill>
+                <a:latin typeface="맑은 고딕"/>
+                <a:ea typeface="맑은 고딕"/>
+              </a:rPr>
+              <a:t>  Towards AI-Native Software Engineering </a:t>
+            </a:r>
+            <a:r>
+              <a:rPr sz="800" b="0">
+                <a:solidFill>
+                  <a:srgbClr val="000000"/>
+                </a:solidFill>
+                <a:latin typeface="맑은 고딕"/>
+                <a:ea typeface="맑은 고딕"/>
+              </a:rPr>
+              <a:t>(SE 3.0)</a:t>
+            </a:r>
+            <a:r>
+              <a:rPr sz="800" b="0">
+                <a:solidFill>
+                  <a:srgbClr val="000000"/>
+                </a:solidFill>
+                <a:latin typeface="맑은 고딕"/>
+                <a:ea typeface="맑은 고딕"/>
+              </a:rPr>
+              <a:t> —</a:t>
+            </a:r>
+            <a:r>
+              <a:rPr sz="800" b="0">
+                <a:solidFill>
+                  <a:srgbClr val="000000"/>
+                </a:solidFill>
+                <a:latin typeface="맑은 고딕"/>
+                <a:ea typeface="맑은 고딕"/>
+              </a:rPr>
+              <a:t> A Vision and a Challenge Roadmap, Ahmed E. Hassan·Gustavo A. Oliva·Dayi Lin·Boyuan Chen·Zhen Ming </a:t>
+            </a:r>
+            <a:r>
+              <a:rPr sz="800" b="0">
+                <a:solidFill>
+                  <a:srgbClr val="000000"/>
+                </a:solidFill>
+                <a:latin typeface="맑은 고딕"/>
+                <a:ea typeface="맑은 고딕"/>
+              </a:rPr>
+              <a:t>(Jack)</a:t>
+            </a:r>
+            <a:r>
+              <a:rPr sz="800" b="0">
+                <a:solidFill>
+                  <a:srgbClr val="000000"/>
+                </a:solidFill>
+                <a:latin typeface="맑은 고딕"/>
+                <a:ea typeface="맑은 고딕"/>
+              </a:rPr>
+              <a:t> Jiang, ACM Transactions on Software Engineering and Methodology 35</a:t>
+            </a:r>
+            <a:r>
+              <a:rPr sz="800" b="0">
+                <a:solidFill>
+                  <a:srgbClr val="000000"/>
+                </a:solidFill>
+                <a:latin typeface="맑은 고딕"/>
+                <a:ea typeface="맑은 고딕"/>
+              </a:rPr>
+              <a:t>(9)</a:t>
+            </a:r>
+            <a:r>
+              <a:rPr sz="800" b="0">
+                <a:solidFill>
+                  <a:srgbClr val="000000"/>
+                </a:solidFill>
+                <a:latin typeface="맑은 고딕"/>
+                <a:ea typeface="맑은 고딕"/>
+              </a:rPr>
+              <a:t>, 2026, https://doi.org/10.1145/3807901</a:t>
             </a:r>
           </a:p>
           <a:p>
@@ -3105,7 +3503,7 @@
                 <a:latin typeface="맑은 고딕"/>
                 <a:ea typeface="맑은 고딕"/>
               </a:rPr>
-              <a:t>23. </a:t>
+              <a:t>29. </a:t>
             </a:r>
             <a:r>
               <a:rPr sz="800" b="1">
@@ -3146,7 +3544,7 @@
                 <a:latin typeface="맑은 고딕"/>
                 <a:ea typeface="맑은 고딕"/>
               </a:rPr>
-              <a:t>24. </a:t>
+              <a:t>30. </a:t>
             </a:r>
             <a:r>
               <a:rPr sz="800" b="1">
@@ -3207,7 +3605,7 @@
                 <a:latin typeface="맑은 고딕"/>
                 <a:ea typeface="맑은 고딕"/>
               </a:rPr>
-              <a:t>25. </a:t>
+              <a:t>31. </a:t>
             </a:r>
             <a:r>
               <a:rPr sz="800" b="1">
@@ -3248,7 +3646,7 @@
                 <a:latin typeface="맑은 고딕"/>
                 <a:ea typeface="맑은 고딕"/>
               </a:rPr>
-              <a:t>26. </a:t>
+              <a:t>32. </a:t>
             </a:r>
             <a:r>
               <a:rPr sz="800" b="1">
@@ -3258,6 +3656,47 @@
                 <a:latin typeface="맑은 고딕"/>
                 <a:ea typeface="맑은 고딕"/>
               </a:rPr>
+              <a:t>[Lewis·Fowler 2014]</a:t>
+            </a:r>
+            <a:r>
+              <a:rPr sz="800" b="0">
+                <a:solidFill>
+                  <a:srgbClr val="000000"/>
+                </a:solidFill>
+                <a:latin typeface="맑은 고딕"/>
+                <a:ea typeface="맑은 고딕"/>
+              </a:rPr>
+              <a:t>  Microservices, James Lewis·Martin Fowler, martinfowler.com, 2014, https://martinfowler.com/articles/microservices.html</a:t>
+            </a:r>
+          </a:p>
+          <a:p>
+            <a:pPr lvl="2" marL="167640" indent="-167640">
+              <a:spcBef>
+                <a:spcPts val="100"/>
+              </a:spcBef>
+              <a:spcAft>
+                <a:spcPts val="100"/>
+              </a:spcAft>
+              <a:buNone/>
+            </a:pPr>
+            <a:r>
+              <a:rPr sz="800" b="0">
+                <a:solidFill>
+                  <a:srgbClr val="000000"/>
+                </a:solidFill>
+                <a:latin typeface="맑은 고딕"/>
+                <a:ea typeface="맑은 고딕"/>
+              </a:rPr>
+              <a:t>33. </a:t>
+            </a:r>
+            <a:r>
+              <a:rPr sz="800" b="1">
+                <a:solidFill>
+                  <a:srgbClr val="000000"/>
+                </a:solidFill>
+                <a:latin typeface="맑은 고딕"/>
+                <a:ea typeface="맑은 고딕"/>
+              </a:rPr>
               <a:t>[Lopopolo 2026]</a:t>
             </a:r>
             <a:r>
@@ -3289,7 +3728,7 @@
                 <a:latin typeface="맑은 고딕"/>
                 <a:ea typeface="맑은 고딕"/>
               </a:rPr>
-              <a:t>27. </a:t>
+              <a:t>34. </a:t>
             </a:r>
             <a:r>
               <a:rPr sz="800" b="1">
@@ -3299,6 +3738,88 @@
                 <a:latin typeface="맑은 고딕"/>
                 <a:ea typeface="맑은 고딕"/>
               </a:rPr>
+              <a:t>[Martin 2000]</a:t>
+            </a:r>
+            <a:r>
+              <a:rPr sz="800" b="0">
+                <a:solidFill>
+                  <a:srgbClr val="000000"/>
+                </a:solidFill>
+                <a:latin typeface="맑은 고딕"/>
+                <a:ea typeface="맑은 고딕"/>
+              </a:rPr>
+              <a:t>  Design Principles and Design Patterns, Robert C. Martin, 2000, https://staff.cs.utu.fi/~jounsmed/doos_06/material/DesignPrinciplesAndPatterns.pdf</a:t>
+            </a:r>
+          </a:p>
+          <a:p>
+            <a:pPr lvl="2" marL="167640" indent="-167640">
+              <a:spcBef>
+                <a:spcPts val="100"/>
+              </a:spcBef>
+              <a:spcAft>
+                <a:spcPts val="100"/>
+              </a:spcAft>
+              <a:buNone/>
+            </a:pPr>
+            <a:r>
+              <a:rPr sz="800" b="0">
+                <a:solidFill>
+                  <a:srgbClr val="000000"/>
+                </a:solidFill>
+                <a:latin typeface="맑은 고딕"/>
+                <a:ea typeface="맑은 고딕"/>
+              </a:rPr>
+              <a:t>35. </a:t>
+            </a:r>
+            <a:r>
+              <a:rPr sz="800" b="1">
+                <a:solidFill>
+                  <a:srgbClr val="000000"/>
+                </a:solidFill>
+                <a:latin typeface="맑은 고딕"/>
+                <a:ea typeface="맑은 고딕"/>
+              </a:rPr>
+              <a:t>[Martin 2014]</a:t>
+            </a:r>
+            <a:r>
+              <a:rPr sz="800" b="0">
+                <a:solidFill>
+                  <a:srgbClr val="000000"/>
+                </a:solidFill>
+                <a:latin typeface="맑은 고딕"/>
+                <a:ea typeface="맑은 고딕"/>
+              </a:rPr>
+              <a:t>  The Single Responsibility Principle, Robert C. Martin, The Clean Code Blog, 2014, https://blog.cleancoder.com/uncle-bob/2014/05/08/SingleReponsibilityPrinciple.html</a:t>
+            </a:r>
+          </a:p>
+          <a:p>
+            <a:pPr lvl="2" marL="167640" indent="-167640">
+              <a:spcBef>
+                <a:spcPts val="100"/>
+              </a:spcBef>
+              <a:spcAft>
+                <a:spcPts val="100"/>
+              </a:spcAft>
+              <a:buNone/>
+            </a:pPr>
+            <a:r>
+              <a:rPr sz="800" b="0">
+                <a:solidFill>
+                  <a:srgbClr val="000000"/>
+                </a:solidFill>
+                <a:latin typeface="맑은 고딕"/>
+                <a:ea typeface="맑은 고딕"/>
+              </a:rPr>
+              <a:t>36. </a:t>
+            </a:r>
+            <a:r>
+              <a:rPr sz="800" b="1">
+                <a:solidFill>
+                  <a:srgbClr val="000000"/>
+                </a:solidFill>
+                <a:latin typeface="맑은 고딕"/>
+                <a:ea typeface="맑은 고딕"/>
+              </a:rPr>
               <a:t>[MCP 2025]</a:t>
             </a:r>
             <a:r>
@@ -3330,7 +3851,7 @@
                 <a:latin typeface="맑은 고딕"/>
                 <a:ea typeface="맑은 고딕"/>
               </a:rPr>
-              <a:t>28. </a:t>
+              <a:t>37. </a:t>
             </a:r>
             <a:r>
               <a:rPr sz="800" b="1">
@@ -3400,7 +3921,7 @@
                 <a:latin typeface="맑은 고딕"/>
                 <a:ea typeface="맑은 고딕"/>
               </a:rPr>
-              <a:t>29. </a:t>
+              <a:t>38. </a:t>
             </a:r>
             <a:r>
               <a:rPr sz="800" b="1">
@@ -3410,6 +3931,67 @@
                 <a:latin typeface="맑은 고딕"/>
                 <a:ea typeface="맑은 고딕"/>
               </a:rPr>
+              <a:t>[Meyer 1992]</a:t>
+            </a:r>
+            <a:r>
+              <a:rPr sz="800" b="0">
+                <a:solidFill>
+                  <a:srgbClr val="000000"/>
+                </a:solidFill>
+                <a:latin typeface="맑은 고딕"/>
+                <a:ea typeface="맑은 고딕"/>
+              </a:rPr>
+              <a:t>  Applying "Design by Contract", Bertrand Meyer, IEEE Computer 25</a:t>
+            </a:r>
+            <a:r>
+              <a:rPr sz="800" b="0">
+                <a:solidFill>
+                  <a:srgbClr val="000000"/>
+                </a:solidFill>
+                <a:latin typeface="맑은 고딕"/>
+                <a:ea typeface="맑은 고딕"/>
+              </a:rPr>
+              <a:t>(10)</a:t>
+            </a:r>
+            <a:r>
+              <a:rPr sz="800" b="0">
+                <a:solidFill>
+                  <a:srgbClr val="000000"/>
+                </a:solidFill>
+                <a:latin typeface="맑은 고딕"/>
+                <a:ea typeface="맑은 고딕"/>
+              </a:rPr>
+              <a:t>, 1992, https://se.inf.ethz.ch/~meyer/publications/computer/contract.pdf</a:t>
+            </a:r>
+          </a:p>
+          <a:p>
+            <a:pPr lvl="2" marL="167640" indent="-167640">
+              <a:spcBef>
+                <a:spcPts val="100"/>
+              </a:spcBef>
+              <a:spcAft>
+                <a:spcPts val="100"/>
+              </a:spcAft>
+              <a:buNone/>
+            </a:pPr>
+            <a:r>
+              <a:rPr sz="800" b="0">
+                <a:solidFill>
+                  <a:srgbClr val="000000"/>
+                </a:solidFill>
+                <a:latin typeface="맑은 고딕"/>
+                <a:ea typeface="맑은 고딕"/>
+              </a:rPr>
+              <a:t>39. </a:t>
+            </a:r>
+            <a:r>
+              <a:rPr sz="800" b="1">
+                <a:solidFill>
+                  <a:srgbClr val="000000"/>
+                </a:solidFill>
+                <a:latin typeface="맑은 고딕"/>
+                <a:ea typeface="맑은 고딕"/>
+              </a:rPr>
               <a:t>[NIST 2023]</a:t>
             </a:r>
             <a:r>
@@ -3461,7 +4043,7 @@
                 <a:latin typeface="맑은 고딕"/>
                 <a:ea typeface="맑은 고딕"/>
               </a:rPr>
-              <a:t>30. </a:t>
+              <a:t>40. </a:t>
             </a:r>
             <a:r>
               <a:rPr sz="800" b="1">
@@ -3502,7 +4084,7 @@
                 <a:latin typeface="맑은 고딕"/>
                 <a:ea typeface="맑은 고딕"/>
               </a:rPr>
-              <a:t>31. </a:t>
+              <a:t>41. </a:t>
             </a:r>
             <a:r>
               <a:rPr sz="800" b="1">
@@ -3543,7 +4125,7 @@
                 <a:latin typeface="맑은 고딕"/>
                 <a:ea typeface="맑은 고딕"/>
               </a:rPr>
-              <a:t>32. </a:t>
+              <a:t>42. </a:t>
             </a:r>
             <a:r>
               <a:rPr sz="800" b="1">
@@ -3584,7 +4166,7 @@
                 <a:latin typeface="맑은 고딕"/>
                 <a:ea typeface="맑은 고딕"/>
               </a:rPr>
-              <a:t>33. </a:t>
+              <a:t>43. </a:t>
             </a:r>
             <a:r>
               <a:rPr sz="800" b="1">
@@ -3594,6 +4176,57 @@
                 <a:latin typeface="맑은 고딕"/>
                 <a:ea typeface="맑은 고딕"/>
               </a:rPr>
+              <a:t>[OpenAI: Permissions]</a:t>
+            </a:r>
+            <a:r>
+              <a:rPr sz="800" b="0">
+                <a:solidFill>
+                  <a:srgbClr val="000000"/>
+                </a:solidFill>
+                <a:latin typeface="맑은 고딕"/>
+                <a:ea typeface="맑은 고딕"/>
+              </a:rPr>
+              <a:t>  Permissions, OpenAI, https://learn.chatgpt.com/docs/permissions </a:t>
+            </a:r>
+            <a:r>
+              <a:rPr sz="800" b="0">
+                <a:solidFill>
+                  <a:srgbClr val="000000"/>
+                </a:solidFill>
+                <a:latin typeface="맑은 고딕"/>
+                <a:ea typeface="맑은 고딕"/>
+              </a:rPr>
+              <a:t>(2026-10 확인)</a:t>
+            </a:r>
+          </a:p>
+          <a:p>
+            <a:pPr lvl="2" marL="167640" indent="-167640">
+              <a:spcBef>
+                <a:spcPts val="100"/>
+              </a:spcBef>
+              <a:spcAft>
+                <a:spcPts val="100"/>
+              </a:spcAft>
+              <a:buNone/>
+            </a:pPr>
+            <a:r>
+              <a:rPr sz="800" b="0">
+                <a:solidFill>
+                  <a:srgbClr val="000000"/>
+                </a:solidFill>
+                <a:latin typeface="맑은 고딕"/>
+                <a:ea typeface="맑은 고딕"/>
+              </a:rPr>
+              <a:t>44. </a:t>
+            </a:r>
+            <a:r>
+              <a:rPr sz="800" b="1">
+                <a:solidFill>
+                  <a:srgbClr val="000000"/>
+                </a:solidFill>
+                <a:latin typeface="맑은 고딕"/>
+                <a:ea typeface="맑은 고딕"/>
+              </a:rPr>
               <a:t>[Osmani 2025]</a:t>
             </a:r>
             <a:r>
@@ -3625,7 +4258,7 @@
                 <a:latin typeface="맑은 고딕"/>
                 <a:ea typeface="맑은 고딕"/>
               </a:rPr>
-              <a:t>34. </a:t>
+              <a:t>45. </a:t>
             </a:r>
             <a:r>
               <a:rPr sz="800" b="1">
@@ -3666,7 +4299,7 @@
                 <a:latin typeface="맑은 고딕"/>
                 <a:ea typeface="맑은 고딕"/>
               </a:rPr>
-              <a:t>35. </a:t>
+              <a:t>46. </a:t>
             </a:r>
             <a:r>
               <a:rPr sz="800" b="1">
@@ -3707,7 +4340,7 @@
                 <a:latin typeface="맑은 고딕"/>
                 <a:ea typeface="맑은 고딕"/>
               </a:rPr>
-              <a:t>36. </a:t>
+              <a:t>47. </a:t>
             </a:r>
             <a:r>
               <a:rPr sz="800" b="1">
@@ -3748,7 +4381,7 @@
                 <a:latin typeface="맑은 고딕"/>
                 <a:ea typeface="맑은 고딕"/>
               </a:rPr>
-              <a:t>37. </a:t>
+              <a:t>48. </a:t>
             </a:r>
             <a:r>
               <a:rPr sz="800" b="1">
@@ -3789,7 +4422,7 @@
                 <a:latin typeface="맑은 고딕"/>
                 <a:ea typeface="맑은 고딕"/>
               </a:rPr>
-              <a:t>38. </a:t>
+              <a:t>49. </a:t>
             </a:r>
             <a:r>
               <a:rPr sz="800" b="1">
@@ -3810,6 +4443,47 @@
                 <a:ea typeface="맑은 고딕"/>
               </a:rPr>
               <a:t>  Vibe engineering, Simon Willison, 2025, https://simonwillison.net/2025/Oct/7/vibe-engineering/</a:t>
+            </a:r>
+          </a:p>
+          <a:p>
+            <a:pPr lvl="2" marL="167640" indent="-167640">
+              <a:spcBef>
+                <a:spcPts val="100"/>
+              </a:spcBef>
+              <a:spcAft>
+                <a:spcPts val="100"/>
+              </a:spcAft>
+              <a:buNone/>
+            </a:pPr>
+            <a:r>
+              <a:rPr sz="800" b="0">
+                <a:solidFill>
+                  <a:srgbClr val="000000"/>
+                </a:solidFill>
+                <a:latin typeface="맑은 고딕"/>
+                <a:ea typeface="맑은 고딕"/>
+              </a:rPr>
+              <a:t>50. </a:t>
+            </a:r>
+            <a:r>
+              <a:rPr sz="800" b="1">
+                <a:solidFill>
+                  <a:srgbClr val="000000"/>
+                </a:solidFill>
+                <a:latin typeface="맑은 고딕"/>
+                <a:ea typeface="맑은 고딕"/>
+              </a:rPr>
+              <a:t>[Wirfs-Brock 2006]</a:t>
+            </a:r>
+            <a:r>
+              <a:rPr sz="800" b="0">
+                <a:solidFill>
+                  <a:srgbClr val="000000"/>
+                </a:solidFill>
+                <a:latin typeface="맑은 고딕"/>
+                <a:ea typeface="맑은 고딕"/>
+              </a:rPr>
+              <a:t>  A Brief Tour of Responsibility-Driven Design, Rebecca Wirfs-Brock, Wirfs-Brock Associates, 2006, https://www.wirfs-brock.com/PDFs/A_Brief-Tour-of-RDD.pdf</a:t>
             </a:r>
           </a:p>
         </p:txBody>

--- a/courses/ai-native/sessions/references.pptx
+++ b/courses/ai-native/sessions/references.pptx
@@ -533,6 +533,13 @@
             <a:r>
               <a:rPr lang="ko-KR" sz="1200"/>
               <a:t>과정의 기준 원전(주제별 1차 원문)과 보완 자료, 세션이 레이블로 인용·참조한 자료를 하나의 목록으로 레이블의 알파벳 순서로 둔다(course-design.md의 「기준 원전과 참고 자료」).</a:t>
+            </a:r>
+          </a:p>
+          <a:p>
+            <a:pPr lvl="0"/>
+            <a:r>
+              <a:rPr lang="ko-KR" sz="1200"/>
+              <a:t>끝에 (읽을거리)가 붙은 항목은 세션 원고가 인용하지 않는 자료다. 수강생이 더 읽을 것으로 두며, 본문이 쓰지 않는 것이 의도된 상태임을 밝힌다(Production이 그 표식으로 구분해 검사한다).</a:t>
             </a:r>
           </a:p>
           <a:p>
@@ -1937,17 +1944,17 @@
           </a:bodyPr>
           <a:lstStyle/>
           <a:p>
-            <a:pPr lvl="2" marL="111760" indent="-111760">
-              <a:spcBef>
-                <a:spcPts val="100"/>
-              </a:spcBef>
-              <a:spcAft>
-                <a:spcPts val="100"/>
-              </a:spcAft>
-              <a:buNone/>
-            </a:pPr>
-            <a:r>
-              <a:rPr sz="800" b="0">
+            <a:pPr lvl="2" marL="97790" indent="-97790">
+              <a:spcBef>
+                <a:spcPts val="100"/>
+              </a:spcBef>
+              <a:spcAft>
+                <a:spcPts val="100"/>
+              </a:spcAft>
+              <a:buNone/>
+            </a:pPr>
+            <a:r>
+              <a:rPr sz="700" b="0">
                 <a:solidFill>
                   <a:srgbClr val="000000"/>
                 </a:solidFill>
@@ -1957,7 +1964,7 @@
               <a:t>1. </a:t>
             </a:r>
             <a:r>
-              <a:rPr sz="800" b="1">
+              <a:rPr sz="700" b="1">
                 <a:solidFill>
                   <a:srgbClr val="000000"/>
                 </a:solidFill>
@@ -1967,7 +1974,7 @@
               <a:t>[AGENTS.md]</a:t>
             </a:r>
             <a:r>
-              <a:rPr sz="800" b="0">
+              <a:rPr sz="700" b="0">
                 <a:solidFill>
                   <a:srgbClr val="000000"/>
                 </a:solidFill>
@@ -1978,17 +1985,17 @@
             </a:r>
           </a:p>
           <a:p>
-            <a:pPr lvl="2" marL="111760" indent="-111760">
-              <a:spcBef>
-                <a:spcPts val="100"/>
-              </a:spcBef>
-              <a:spcAft>
-                <a:spcPts val="100"/>
-              </a:spcAft>
-              <a:buNone/>
-            </a:pPr>
-            <a:r>
-              <a:rPr sz="800" b="0">
+            <a:pPr lvl="2" marL="97790" indent="-97790">
+              <a:spcBef>
+                <a:spcPts val="100"/>
+              </a:spcBef>
+              <a:spcAft>
+                <a:spcPts val="100"/>
+              </a:spcAft>
+              <a:buNone/>
+            </a:pPr>
+            <a:r>
+              <a:rPr sz="700" b="0">
                 <a:solidFill>
                   <a:srgbClr val="000000"/>
                 </a:solidFill>
@@ -1998,7 +2005,7 @@
               <a:t>2. </a:t>
             </a:r>
             <a:r>
-              <a:rPr sz="800" b="1">
+              <a:rPr sz="700" b="1">
                 <a:solidFill>
                   <a:srgbClr val="000000"/>
                 </a:solidFill>
@@ -2008,7 +2015,7 @@
               <a:t>[Anthropic 2024]</a:t>
             </a:r>
             <a:r>
-              <a:rPr sz="800" b="0">
+              <a:rPr sz="700" b="0">
                 <a:solidFill>
                   <a:srgbClr val="000000"/>
                 </a:solidFill>
@@ -2019,17 +2026,17 @@
             </a:r>
           </a:p>
           <a:p>
-            <a:pPr lvl="2" marL="111760" indent="-111760">
-              <a:spcBef>
-                <a:spcPts val="100"/>
-              </a:spcBef>
-              <a:spcAft>
-                <a:spcPts val="100"/>
-              </a:spcAft>
-              <a:buNone/>
-            </a:pPr>
-            <a:r>
-              <a:rPr sz="800" b="0">
+            <a:pPr lvl="2" marL="97790" indent="-97790">
+              <a:spcBef>
+                <a:spcPts val="100"/>
+              </a:spcBef>
+              <a:spcAft>
+                <a:spcPts val="100"/>
+              </a:spcAft>
+              <a:buNone/>
+            </a:pPr>
+            <a:r>
+              <a:rPr sz="700" b="0">
                 <a:solidFill>
                   <a:srgbClr val="000000"/>
                 </a:solidFill>
@@ -2039,7 +2046,7 @@
               <a:t>3. </a:t>
             </a:r>
             <a:r>
-              <a:rPr sz="800" b="1">
+              <a:rPr sz="700" b="1">
                 <a:solidFill>
                   <a:srgbClr val="000000"/>
                 </a:solidFill>
@@ -2049,7 +2056,7 @@
               <a:t>[Anthropic 2025a]</a:t>
             </a:r>
             <a:r>
-              <a:rPr sz="800" b="0">
+              <a:rPr sz="700" b="0">
                 <a:solidFill>
                   <a:srgbClr val="000000"/>
                 </a:solidFill>
@@ -2060,17 +2067,17 @@
             </a:r>
           </a:p>
           <a:p>
-            <a:pPr lvl="2" marL="111760" indent="-111760">
-              <a:spcBef>
-                <a:spcPts val="100"/>
-              </a:spcBef>
-              <a:spcAft>
-                <a:spcPts val="100"/>
-              </a:spcAft>
-              <a:buNone/>
-            </a:pPr>
-            <a:r>
-              <a:rPr sz="800" b="0">
+            <a:pPr lvl="2" marL="97790" indent="-97790">
+              <a:spcBef>
+                <a:spcPts val="100"/>
+              </a:spcBef>
+              <a:spcAft>
+                <a:spcPts val="100"/>
+              </a:spcAft>
+              <a:buNone/>
+            </a:pPr>
+            <a:r>
+              <a:rPr sz="700" b="0">
                 <a:solidFill>
                   <a:srgbClr val="000000"/>
                 </a:solidFill>
@@ -2080,7 +2087,7 @@
               <a:t>4. </a:t>
             </a:r>
             <a:r>
-              <a:rPr sz="800" b="1">
+              <a:rPr sz="700" b="1">
                 <a:solidFill>
                   <a:srgbClr val="000000"/>
                 </a:solidFill>
@@ -2090,7 +2097,7 @@
               <a:t>[Anthropic 2025b]</a:t>
             </a:r>
             <a:r>
-              <a:rPr sz="800" b="0">
+              <a:rPr sz="700" b="0">
                 <a:solidFill>
                   <a:srgbClr val="000000"/>
                 </a:solidFill>
@@ -2100,7 +2107,7 @@
               <a:t>  Writing effective tools for AI agents—</a:t>
             </a:r>
             <a:r>
-              <a:rPr sz="800" b="0">
+              <a:rPr sz="700" b="0">
                 <a:solidFill>
                   <a:srgbClr val="000000"/>
                 </a:solidFill>
@@ -2111,17 +2118,17 @@
             </a:r>
           </a:p>
           <a:p>
-            <a:pPr lvl="2" marL="111760" indent="-111760">
-              <a:spcBef>
-                <a:spcPts val="100"/>
-              </a:spcBef>
-              <a:spcAft>
-                <a:spcPts val="100"/>
-              </a:spcAft>
-              <a:buNone/>
-            </a:pPr>
-            <a:r>
-              <a:rPr sz="800" b="0">
+            <a:pPr lvl="2" marL="97790" indent="-97790">
+              <a:spcBef>
+                <a:spcPts val="100"/>
+              </a:spcBef>
+              <a:spcAft>
+                <a:spcPts val="100"/>
+              </a:spcAft>
+              <a:buNone/>
+            </a:pPr>
+            <a:r>
+              <a:rPr sz="700" b="0">
                 <a:solidFill>
                   <a:srgbClr val="000000"/>
                 </a:solidFill>
@@ -2131,7 +2138,7 @@
               <a:t>5. </a:t>
             </a:r>
             <a:r>
-              <a:rPr sz="800" b="1">
+              <a:rPr sz="700" b="1">
                 <a:solidFill>
                   <a:srgbClr val="000000"/>
                 </a:solidFill>
@@ -2141,7 +2148,7 @@
               <a:t>[Anthropic 2025c]</a:t>
             </a:r>
             <a:r>
-              <a:rPr sz="800" b="0">
+              <a:rPr sz="700" b="0">
                 <a:solidFill>
                   <a:srgbClr val="000000"/>
                 </a:solidFill>
@@ -2152,17 +2159,17 @@
             </a:r>
           </a:p>
           <a:p>
-            <a:pPr lvl="2" marL="111760" indent="-111760">
-              <a:spcBef>
-                <a:spcPts val="100"/>
-              </a:spcBef>
-              <a:spcAft>
-                <a:spcPts val="100"/>
-              </a:spcAft>
-              <a:buNone/>
-            </a:pPr>
-            <a:r>
-              <a:rPr sz="800" b="0">
+            <a:pPr lvl="2" marL="97790" indent="-97790">
+              <a:spcBef>
+                <a:spcPts val="100"/>
+              </a:spcBef>
+              <a:spcAft>
+                <a:spcPts val="100"/>
+              </a:spcAft>
+              <a:buNone/>
+            </a:pPr>
+            <a:r>
+              <a:rPr sz="700" b="0">
                 <a:solidFill>
                   <a:srgbClr val="000000"/>
                 </a:solidFill>
@@ -2172,7 +2179,7 @@
               <a:t>6. </a:t>
             </a:r>
             <a:r>
-              <a:rPr sz="800" b="1">
+              <a:rPr sz="700" b="1">
                 <a:solidFill>
                   <a:srgbClr val="000000"/>
                 </a:solidFill>
@@ -2182,7 +2189,7 @@
               <a:t>[Anthropic 2025d]</a:t>
             </a:r>
             <a:r>
-              <a:rPr sz="800" b="0">
+              <a:rPr sz="700" b="0">
                 <a:solidFill>
                   <a:srgbClr val="000000"/>
                 </a:solidFill>
@@ -2193,17 +2200,17 @@
             </a:r>
           </a:p>
           <a:p>
-            <a:pPr lvl="2" marL="111760" indent="-111760">
-              <a:spcBef>
-                <a:spcPts val="100"/>
-              </a:spcBef>
-              <a:spcAft>
-                <a:spcPts val="100"/>
-              </a:spcAft>
-              <a:buNone/>
-            </a:pPr>
-            <a:r>
-              <a:rPr sz="800" b="0">
+            <a:pPr lvl="2" marL="97790" indent="-97790">
+              <a:spcBef>
+                <a:spcPts val="100"/>
+              </a:spcBef>
+              <a:spcAft>
+                <a:spcPts val="100"/>
+              </a:spcAft>
+              <a:buNone/>
+            </a:pPr>
+            <a:r>
+              <a:rPr sz="700" b="0">
                 <a:solidFill>
                   <a:srgbClr val="000000"/>
                 </a:solidFill>
@@ -2213,7 +2220,7 @@
               <a:t>7. </a:t>
             </a:r>
             <a:r>
-              <a:rPr sz="800" b="1">
+              <a:rPr sz="700" b="1">
                 <a:solidFill>
                   <a:srgbClr val="000000"/>
                 </a:solidFill>
@@ -2223,7 +2230,7 @@
               <a:t>[Anthropic 2026a]</a:t>
             </a:r>
             <a:r>
-              <a:rPr sz="800" b="0">
+              <a:rPr sz="700" b="0">
                 <a:solidFill>
                   <a:srgbClr val="000000"/>
                 </a:solidFill>
@@ -2234,17 +2241,17 @@
             </a:r>
           </a:p>
           <a:p>
-            <a:pPr lvl="2" marL="111760" indent="-111760">
-              <a:spcBef>
-                <a:spcPts val="100"/>
-              </a:spcBef>
-              <a:spcAft>
-                <a:spcPts val="100"/>
-              </a:spcAft>
-              <a:buNone/>
-            </a:pPr>
-            <a:r>
-              <a:rPr sz="800" b="0">
+            <a:pPr lvl="2" marL="97790" indent="-97790">
+              <a:spcBef>
+                <a:spcPts val="100"/>
+              </a:spcBef>
+              <a:spcAft>
+                <a:spcPts val="100"/>
+              </a:spcAft>
+              <a:buNone/>
+            </a:pPr>
+            <a:r>
+              <a:rPr sz="700" b="0">
                 <a:solidFill>
                   <a:srgbClr val="000000"/>
                 </a:solidFill>
@@ -2254,7 +2261,7 @@
               <a:t>8. </a:t>
             </a:r>
             <a:r>
-              <a:rPr sz="800" b="1">
+              <a:rPr sz="700" b="1">
                 <a:solidFill>
                   <a:srgbClr val="000000"/>
                 </a:solidFill>
@@ -2264,7 +2271,7 @@
               <a:t>[Anthropic 2026b]</a:t>
             </a:r>
             <a:r>
-              <a:rPr sz="800" b="0">
+              <a:rPr sz="700" b="0">
                 <a:solidFill>
                   <a:srgbClr val="000000"/>
                 </a:solidFill>
@@ -2275,17 +2282,17 @@
             </a:r>
           </a:p>
           <a:p>
-            <a:pPr lvl="2" marL="111760" indent="-111760">
-              <a:spcBef>
-                <a:spcPts val="100"/>
-              </a:spcBef>
-              <a:spcAft>
-                <a:spcPts val="100"/>
-              </a:spcAft>
-              <a:buNone/>
-            </a:pPr>
-            <a:r>
-              <a:rPr sz="800" b="0">
+            <a:pPr lvl="2" marL="97790" indent="-97790">
+              <a:spcBef>
+                <a:spcPts val="100"/>
+              </a:spcBef>
+              <a:spcAft>
+                <a:spcPts val="100"/>
+              </a:spcAft>
+              <a:buNone/>
+            </a:pPr>
+            <a:r>
+              <a:rPr sz="700" b="0">
                 <a:solidFill>
                   <a:srgbClr val="000000"/>
                 </a:solidFill>
@@ -2295,7 +2302,7 @@
               <a:t>9. </a:t>
             </a:r>
             <a:r>
-              <a:rPr sz="800" b="1">
+              <a:rPr sz="700" b="1">
                 <a:solidFill>
                   <a:srgbClr val="000000"/>
                 </a:solidFill>
@@ -2305,7 +2312,7 @@
               <a:t>[Anthropic 2026c]</a:t>
             </a:r>
             <a:r>
-              <a:rPr sz="800" b="0">
+              <a:rPr sz="700" b="0">
                 <a:solidFill>
                   <a:srgbClr val="000000"/>
                 </a:solidFill>
@@ -2316,17 +2323,17 @@
             </a:r>
           </a:p>
           <a:p>
-            <a:pPr lvl="2" marL="167640" indent="-167640">
-              <a:spcBef>
-                <a:spcPts val="100"/>
-              </a:spcBef>
-              <a:spcAft>
-                <a:spcPts val="100"/>
-              </a:spcAft>
-              <a:buNone/>
-            </a:pPr>
-            <a:r>
-              <a:rPr sz="800" b="0">
+            <a:pPr lvl="2" marL="146685" indent="-146685">
+              <a:spcBef>
+                <a:spcPts val="100"/>
+              </a:spcBef>
+              <a:spcAft>
+                <a:spcPts val="100"/>
+              </a:spcAft>
+              <a:buNone/>
+            </a:pPr>
+            <a:r>
+              <a:rPr sz="700" b="0">
                 <a:solidFill>
                   <a:srgbClr val="000000"/>
                 </a:solidFill>
@@ -2336,7 +2343,7 @@
               <a:t>10. </a:t>
             </a:r>
             <a:r>
-              <a:rPr sz="800" b="1">
+              <a:rPr sz="700" b="1">
                 <a:solidFill>
                   <a:srgbClr val="000000"/>
                 </a:solidFill>
@@ -2346,7 +2353,7 @@
               <a:t>[Anthropic: Prompt caching]</a:t>
             </a:r>
             <a:r>
-              <a:rPr sz="800" b="0">
+              <a:rPr sz="700" b="0">
                 <a:solidFill>
                   <a:srgbClr val="000000"/>
                 </a:solidFill>
@@ -2356,7 +2363,7 @@
               <a:t>  Prompt caching, Anthropic, https://platform.claude.com/docs/en/docs/build-with-claude/prompt-caching </a:t>
             </a:r>
             <a:r>
-              <a:rPr sz="800" b="0">
+              <a:rPr sz="700" b="0">
                 <a:solidFill>
                   <a:srgbClr val="000000"/>
                 </a:solidFill>
@@ -2367,17 +2374,17 @@
             </a:r>
           </a:p>
           <a:p>
-            <a:pPr lvl="2" marL="167640" indent="-167640">
-              <a:spcBef>
-                <a:spcPts val="100"/>
-              </a:spcBef>
-              <a:spcAft>
-                <a:spcPts val="100"/>
-              </a:spcAft>
-              <a:buNone/>
-            </a:pPr>
-            <a:r>
-              <a:rPr sz="800" b="0">
+            <a:pPr lvl="2" marL="146685" indent="-146685">
+              <a:spcBef>
+                <a:spcPts val="100"/>
+              </a:spcBef>
+              <a:spcAft>
+                <a:spcPts val="100"/>
+              </a:spcAft>
+              <a:buNone/>
+            </a:pPr>
+            <a:r>
+              <a:rPr sz="700" b="0">
                 <a:solidFill>
                   <a:srgbClr val="000000"/>
                 </a:solidFill>
@@ -2387,7 +2394,7 @@
               <a:t>11. </a:t>
             </a:r>
             <a:r>
-              <a:rPr sz="800" b="1">
+              <a:rPr sz="700" b="1">
                 <a:solidFill>
                   <a:srgbClr val="000000"/>
                 </a:solidFill>
@@ -2397,7 +2404,7 @@
               <a:t>[Beck 2025]</a:t>
             </a:r>
             <a:r>
-              <a:rPr sz="800" b="0">
+              <a:rPr sz="700" b="0">
                 <a:solidFill>
                   <a:srgbClr val="000000"/>
                 </a:solidFill>
@@ -2408,17 +2415,17 @@
             </a:r>
           </a:p>
           <a:p>
-            <a:pPr lvl="2" marL="167640" indent="-167640">
-              <a:spcBef>
-                <a:spcPts val="100"/>
-              </a:spcBef>
-              <a:spcAft>
-                <a:spcPts val="100"/>
-              </a:spcAft>
-              <a:buNone/>
-            </a:pPr>
-            <a:r>
-              <a:rPr sz="800" b="0">
+            <a:pPr lvl="2" marL="146685" indent="-146685">
+              <a:spcBef>
+                <a:spcPts val="100"/>
+              </a:spcBef>
+              <a:spcAft>
+                <a:spcPts val="100"/>
+              </a:spcAft>
+              <a:buNone/>
+            </a:pPr>
+            <a:r>
+              <a:rPr sz="700" b="0">
                 <a:solidFill>
                   <a:srgbClr val="000000"/>
                 </a:solidFill>
@@ -2428,7 +2435,7 @@
               <a:t>12. </a:t>
             </a:r>
             <a:r>
-              <a:rPr sz="800" b="1">
+              <a:rPr sz="700" b="1">
                 <a:solidFill>
                   <a:srgbClr val="000000"/>
                 </a:solidFill>
@@ -2438,7 +2445,7 @@
               <a:t>[Blount 외 2026]</a:t>
             </a:r>
             <a:r>
-              <a:rPr sz="800" b="0">
+              <a:rPr sz="700" b="0">
                 <a:solidFill>
                   <a:srgbClr val="000000"/>
                 </a:solidFill>
@@ -2449,17 +2456,17 @@
             </a:r>
           </a:p>
           <a:p>
-            <a:pPr lvl="2" marL="167640" indent="-167640">
-              <a:spcBef>
-                <a:spcPts val="100"/>
-              </a:spcBef>
-              <a:spcAft>
-                <a:spcPts val="100"/>
-              </a:spcAft>
-              <a:buNone/>
-            </a:pPr>
-            <a:r>
-              <a:rPr sz="800" b="0">
+            <a:pPr lvl="2" marL="146685" indent="-146685">
+              <a:spcBef>
+                <a:spcPts val="100"/>
+              </a:spcBef>
+              <a:spcAft>
+                <a:spcPts val="100"/>
+              </a:spcAft>
+              <a:buNone/>
+            </a:pPr>
+            <a:r>
+              <a:rPr sz="700" b="0">
                 <a:solidFill>
                   <a:srgbClr val="000000"/>
                 </a:solidFill>
@@ -2469,7 +2476,7 @@
               <a:t>13. </a:t>
             </a:r>
             <a:r>
-              <a:rPr sz="800" b="1">
+              <a:rPr sz="700" b="1">
                 <a:solidFill>
                   <a:srgbClr val="000000"/>
                 </a:solidFill>
@@ -2479,7 +2486,7 @@
               <a:t>[Brooks 1986]</a:t>
             </a:r>
             <a:r>
-              <a:rPr sz="800" b="0">
+              <a:rPr sz="700" b="0">
                 <a:solidFill>
                   <a:srgbClr val="000000"/>
                 </a:solidFill>
@@ -2489,7 +2496,7 @@
               <a:t>  No Silver Bullet —</a:t>
             </a:r>
             <a:r>
-              <a:rPr sz="800" b="0">
+              <a:rPr sz="700" b="0">
                 <a:solidFill>
                   <a:srgbClr val="000000"/>
                 </a:solidFill>
@@ -2497,6 +2504,395 @@
                 <a:ea typeface="맑은 고딕"/>
               </a:rPr>
               <a:t> Essence and Accidents of Software Engineering, Frederick P. Brooks Jr., UNC Technical Report TR86-020, 1986, https://www.cs.unc.edu/techreports/86-020.pdf</a:t>
+            </a:r>
+          </a:p>
+          <a:p>
+            <a:pPr lvl="2" marL="146685" indent="-146685">
+              <a:spcBef>
+                <a:spcPts val="100"/>
+              </a:spcBef>
+              <a:spcAft>
+                <a:spcPts val="100"/>
+              </a:spcAft>
+              <a:buNone/>
+            </a:pPr>
+            <a:r>
+              <a:rPr sz="700" b="0">
+                <a:solidFill>
+                  <a:srgbClr val="000000"/>
+                </a:solidFill>
+                <a:latin typeface="맑은 고딕"/>
+                <a:ea typeface="맑은 고딕"/>
+              </a:rPr>
+              <a:t>14. </a:t>
+            </a:r>
+            <a:r>
+              <a:rPr sz="700" b="1">
+                <a:solidFill>
+                  <a:srgbClr val="000000"/>
+                </a:solidFill>
+                <a:latin typeface="맑은 고딕"/>
+                <a:ea typeface="맑은 고딕"/>
+              </a:rPr>
+              <a:t>[Böckeler 2025]</a:t>
+            </a:r>
+            <a:r>
+              <a:rPr sz="700" b="0">
+                <a:solidFill>
+                  <a:srgbClr val="000000"/>
+                </a:solidFill>
+                <a:latin typeface="맑은 고딕"/>
+                <a:ea typeface="맑은 고딕"/>
+              </a:rPr>
+              <a:t>  Understanding Spec-Driven-Development: Kiro, spec-kit, and Tessl, Birgitta Böckeler, martinfowler.com, 2025, https://martinfowler.com/articles/exploring-gen-ai/sdd-3-tools.html</a:t>
+            </a:r>
+          </a:p>
+          <a:p>
+            <a:pPr lvl="2" marL="146685" indent="-146685">
+              <a:spcBef>
+                <a:spcPts val="100"/>
+              </a:spcBef>
+              <a:spcAft>
+                <a:spcPts val="100"/>
+              </a:spcAft>
+              <a:buNone/>
+            </a:pPr>
+            <a:r>
+              <a:rPr sz="700" b="0">
+                <a:solidFill>
+                  <a:srgbClr val="000000"/>
+                </a:solidFill>
+                <a:latin typeface="맑은 고딕"/>
+                <a:ea typeface="맑은 고딕"/>
+              </a:rPr>
+              <a:t>15. </a:t>
+            </a:r>
+            <a:r>
+              <a:rPr sz="700" b="1">
+                <a:solidFill>
+                  <a:srgbClr val="000000"/>
+                </a:solidFill>
+                <a:latin typeface="맑은 고딕"/>
+                <a:ea typeface="맑은 고딕"/>
+              </a:rPr>
+              <a:t>[Böckeler 2026a]</a:t>
+            </a:r>
+            <a:r>
+              <a:rPr sz="700" b="0">
+                <a:solidFill>
+                  <a:srgbClr val="000000"/>
+                </a:solidFill>
+                <a:latin typeface="맑은 고딕"/>
+                <a:ea typeface="맑은 고딕"/>
+              </a:rPr>
+              <a:t>  Harness engineering for coding agent users, Birgitta Böckeler, martinfowler.com, 2026, https://martinfowler.com/articles/exploring-gen-ai/harness-engineering.html</a:t>
+            </a:r>
+          </a:p>
+          <a:p>
+            <a:pPr lvl="2" marL="146685" indent="-146685">
+              <a:spcBef>
+                <a:spcPts val="100"/>
+              </a:spcBef>
+              <a:spcAft>
+                <a:spcPts val="100"/>
+              </a:spcAft>
+              <a:buNone/>
+            </a:pPr>
+            <a:r>
+              <a:rPr sz="700" b="0">
+                <a:solidFill>
+                  <a:srgbClr val="000000"/>
+                </a:solidFill>
+                <a:latin typeface="맑은 고딕"/>
+                <a:ea typeface="맑은 고딕"/>
+              </a:rPr>
+              <a:t>16. </a:t>
+            </a:r>
+            <a:r>
+              <a:rPr sz="700" b="1">
+                <a:solidFill>
+                  <a:srgbClr val="000000"/>
+                </a:solidFill>
+                <a:latin typeface="맑은 고딕"/>
+                <a:ea typeface="맑은 고딕"/>
+              </a:rPr>
+              <a:t>[Böckeler 2026b]</a:t>
+            </a:r>
+            <a:r>
+              <a:rPr sz="700" b="0">
+                <a:solidFill>
+                  <a:srgbClr val="000000"/>
+                </a:solidFill>
+                <a:latin typeface="맑은 고딕"/>
+                <a:ea typeface="맑은 고딕"/>
+              </a:rPr>
+              <a:t>  Maintainability sensors for coding agents, Birgitta Böckeler, martinfowler.com, 2026, https://martinfowler.com/articles/sensors-for-coding-agents.html</a:t>
+            </a:r>
+          </a:p>
+          <a:p>
+            <a:pPr lvl="2" marL="146685" indent="-146685">
+              <a:spcBef>
+                <a:spcPts val="100"/>
+              </a:spcBef>
+              <a:spcAft>
+                <a:spcPts val="100"/>
+              </a:spcAft>
+              <a:buNone/>
+            </a:pPr>
+            <a:r>
+              <a:rPr sz="700" b="0">
+                <a:solidFill>
+                  <a:srgbClr val="000000"/>
+                </a:solidFill>
+                <a:latin typeface="맑은 고딕"/>
+                <a:ea typeface="맑은 고딕"/>
+              </a:rPr>
+              <a:t>17. </a:t>
+            </a:r>
+            <a:r>
+              <a:rPr sz="700" b="1">
+                <a:solidFill>
+                  <a:srgbClr val="000000"/>
+                </a:solidFill>
+                <a:latin typeface="맑은 고딕"/>
+                <a:ea typeface="맑은 고딕"/>
+              </a:rPr>
+              <a:t>[Chen 1976]</a:t>
+            </a:r>
+            <a:r>
+              <a:rPr sz="700" b="0">
+                <a:solidFill>
+                  <a:srgbClr val="000000"/>
+                </a:solidFill>
+                <a:latin typeface="맑은 고딕"/>
+                <a:ea typeface="맑은 고딕"/>
+              </a:rPr>
+              <a:t>  The Entity-Relationship Model —</a:t>
+            </a:r>
+            <a:r>
+              <a:rPr sz="700" b="0">
+                <a:solidFill>
+                  <a:srgbClr val="000000"/>
+                </a:solidFill>
+                <a:latin typeface="맑은 고딕"/>
+                <a:ea typeface="맑은 고딕"/>
+              </a:rPr>
+              <a:t> Toward a Unified View of Data, Peter Pin-Shan Chen, ACM Transactions on Database Systems, 1976, https://www.csc.lsu.edu/~chen/pdf/erd-5-pages.pdf</a:t>
+            </a:r>
+          </a:p>
+          <a:p>
+            <a:pPr lvl="2" marL="146685" indent="-146685">
+              <a:spcBef>
+                <a:spcPts val="100"/>
+              </a:spcBef>
+              <a:spcAft>
+                <a:spcPts val="100"/>
+              </a:spcAft>
+              <a:buNone/>
+            </a:pPr>
+            <a:r>
+              <a:rPr sz="700" b="0">
+                <a:solidFill>
+                  <a:srgbClr val="000000"/>
+                </a:solidFill>
+                <a:latin typeface="맑은 고딕"/>
+                <a:ea typeface="맑은 고딕"/>
+              </a:rPr>
+              <a:t>18. </a:t>
+            </a:r>
+            <a:r>
+              <a:rPr sz="700" b="1">
+                <a:solidFill>
+                  <a:srgbClr val="000000"/>
+                </a:solidFill>
+                <a:latin typeface="맑은 고딕"/>
+                <a:ea typeface="맑은 고딕"/>
+              </a:rPr>
+              <a:t>[Cockburn 2005]</a:t>
+            </a:r>
+            <a:r>
+              <a:rPr sz="700" b="0">
+                <a:solidFill>
+                  <a:srgbClr val="000000"/>
+                </a:solidFill>
+                <a:latin typeface="맑은 고딕"/>
+                <a:ea typeface="맑은 고딕"/>
+              </a:rPr>
+              <a:t>  Hexagonal architecture, Alistair Cockburn, 2005, https://alistair.cockburn.us/hexagonal-architecture/</a:t>
+            </a:r>
+          </a:p>
+          <a:p>
+            <a:pPr lvl="2" marL="146685" indent="-146685">
+              <a:spcBef>
+                <a:spcPts val="100"/>
+              </a:spcBef>
+              <a:spcAft>
+                <a:spcPts val="100"/>
+              </a:spcAft>
+              <a:buNone/>
+            </a:pPr>
+            <a:r>
+              <a:rPr sz="700" b="0">
+                <a:solidFill>
+                  <a:srgbClr val="000000"/>
+                </a:solidFill>
+                <a:latin typeface="맑은 고딕"/>
+                <a:ea typeface="맑은 고딕"/>
+              </a:rPr>
+              <a:t>19. </a:t>
+            </a:r>
+            <a:r>
+              <a:rPr sz="700" b="1">
+                <a:solidFill>
+                  <a:srgbClr val="000000"/>
+                </a:solidFill>
+                <a:latin typeface="맑은 고딕"/>
+                <a:ea typeface="맑은 고딕"/>
+              </a:rPr>
+              <a:t>[Cucumber]</a:t>
+            </a:r>
+            <a:r>
+              <a:rPr sz="700" b="0">
+                <a:solidFill>
+                  <a:srgbClr val="000000"/>
+                </a:solidFill>
+                <a:latin typeface="맑은 고딕"/>
+                <a:ea typeface="맑은 고딕"/>
+              </a:rPr>
+              <a:t>  Behaviour-Driven Development, Cucumber, https://cucumber.io/docs/bdd/</a:t>
+            </a:r>
+          </a:p>
+          <a:p>
+            <a:pPr lvl="2" marL="146685" indent="-146685">
+              <a:spcBef>
+                <a:spcPts val="100"/>
+              </a:spcBef>
+              <a:spcAft>
+                <a:spcPts val="100"/>
+              </a:spcAft>
+              <a:buNone/>
+            </a:pPr>
+            <a:r>
+              <a:rPr sz="700" b="0">
+                <a:solidFill>
+                  <a:srgbClr val="000000"/>
+                </a:solidFill>
+                <a:latin typeface="맑은 고딕"/>
+                <a:ea typeface="맑은 고딕"/>
+              </a:rPr>
+              <a:t>20. </a:t>
+            </a:r>
+            <a:r>
+              <a:rPr sz="700" b="1">
+                <a:solidFill>
+                  <a:srgbClr val="000000"/>
+                </a:solidFill>
+                <a:latin typeface="맑은 고딕"/>
+                <a:ea typeface="맑은 고딕"/>
+              </a:rPr>
+              <a:t>[Cucumber: Example Mapping]</a:t>
+            </a:r>
+            <a:r>
+              <a:rPr sz="700" b="0">
+                <a:solidFill>
+                  <a:srgbClr val="000000"/>
+                </a:solidFill>
+                <a:latin typeface="맑은 고딕"/>
+                <a:ea typeface="맑은 고딕"/>
+              </a:rPr>
+              <a:t>  Example Mapping, Cucumber, https://cucumber.io/docs/bdd/example-mapping/</a:t>
+            </a:r>
+          </a:p>
+          <a:p>
+            <a:pPr lvl="2" marL="146685" indent="-146685">
+              <a:spcBef>
+                <a:spcPts val="100"/>
+              </a:spcBef>
+              <a:spcAft>
+                <a:spcPts val="100"/>
+              </a:spcAft>
+              <a:buNone/>
+            </a:pPr>
+            <a:r>
+              <a:rPr sz="700" b="0">
+                <a:solidFill>
+                  <a:srgbClr val="000000"/>
+                </a:solidFill>
+                <a:latin typeface="맑은 고딕"/>
+                <a:ea typeface="맑은 고딕"/>
+              </a:rPr>
+              <a:t>21. </a:t>
+            </a:r>
+            <a:r>
+              <a:rPr sz="700" b="1">
+                <a:solidFill>
+                  <a:srgbClr val="000000"/>
+                </a:solidFill>
+                <a:latin typeface="맑은 고딕"/>
+                <a:ea typeface="맑은 고딕"/>
+              </a:rPr>
+              <a:t>[DORA 2025]</a:t>
+            </a:r>
+            <a:r>
+              <a:rPr sz="700" b="0">
+                <a:solidFill>
+                  <a:srgbClr val="000000"/>
+                </a:solidFill>
+                <a:latin typeface="맑은 고딕"/>
+                <a:ea typeface="맑은 고딕"/>
+              </a:rPr>
+              <a:t>  State of AI-assisted Software Development 2025, DORA, 2025, https://dora.dev/research/2025/dora-report/ </a:t>
+            </a:r>
+            <a:r>
+              <a:rPr sz="700" b="0">
+                <a:solidFill>
+                  <a:srgbClr val="000000"/>
+                </a:solidFill>
+                <a:latin typeface="맑은 고딕"/>
+                <a:ea typeface="맑은 고딕"/>
+              </a:rPr>
+              <a:t>(읽을거리)</a:t>
+            </a:r>
+          </a:p>
+          <a:p>
+            <a:pPr lvl="2" marL="146685" indent="-146685">
+              <a:spcBef>
+                <a:spcPts val="100"/>
+              </a:spcBef>
+              <a:spcAft>
+                <a:spcPts val="100"/>
+              </a:spcAft>
+              <a:buNone/>
+            </a:pPr>
+            <a:r>
+              <a:rPr sz="700" b="0">
+                <a:solidFill>
+                  <a:srgbClr val="000000"/>
+                </a:solidFill>
+                <a:latin typeface="맑은 고딕"/>
+                <a:ea typeface="맑은 고딕"/>
+              </a:rPr>
+              <a:t>22. </a:t>
+            </a:r>
+            <a:r>
+              <a:rPr sz="700" b="1">
+                <a:solidFill>
+                  <a:srgbClr val="000000"/>
+                </a:solidFill>
+                <a:latin typeface="맑은 고딕"/>
+                <a:ea typeface="맑은 고딕"/>
+              </a:rPr>
+              <a:t>[Evans 2015]</a:t>
+            </a:r>
+            <a:r>
+              <a:rPr sz="700" b="0">
+                <a:solidFill>
+                  <a:srgbClr val="000000"/>
+                </a:solidFill>
+                <a:latin typeface="맑은 고딕"/>
+                <a:ea typeface="맑은 고딕"/>
+              </a:rPr>
+              <a:t>  Domain-Driven Design Reference, Eric Evans, Domain Language, 2015, https://www.domainlanguage.com/wp-content/uploads/2016/05/DDD_Reference_2015-03.pdf</a:t>
             </a:r>
           </a:p>
         </p:txBody>
@@ -2529,15 +2925,340 @@
           </a:bodyPr>
           <a:lstStyle/>
           <a:p>
-            <a:pPr lvl="2" marL="167640" indent="-167640">
-              <a:spcBef>
-                <a:spcPts val="100"/>
-              </a:spcBef>
-              <a:spcAft>
-                <a:spcPts val="100"/>
-              </a:spcAft>
-              <a:buNone/>
-            </a:pPr>
+            <a:pPr lvl="2" marL="146685" indent="-146685">
+              <a:spcBef>
+                <a:spcPts val="100"/>
+              </a:spcBef>
+              <a:spcAft>
+                <a:spcPts val="100"/>
+              </a:spcAft>
+              <a:buNone/>
+            </a:pPr>
+            <a:r>
+              <a:rPr sz="700" b="0">
+                <a:solidFill>
+                  <a:srgbClr val="000000"/>
+                </a:solidFill>
+                <a:latin typeface="맑은 고딕"/>
+                <a:ea typeface="맑은 고딕"/>
+              </a:rPr>
+              <a:t>23. </a:t>
+            </a:r>
+            <a:r>
+              <a:rPr sz="700" b="1">
+                <a:solidFill>
+                  <a:srgbClr val="000000"/>
+                </a:solidFill>
+                <a:latin typeface="맑은 고딕"/>
+                <a:ea typeface="맑은 고딕"/>
+              </a:rPr>
+              <a:t>[Fowler 2015c]</a:t>
+            </a:r>
+            <a:r>
+              <a:rPr sz="700" b="0">
+                <a:solidFill>
+                  <a:srgbClr val="000000"/>
+                </a:solidFill>
+                <a:latin typeface="맑은 고딕"/>
+                <a:ea typeface="맑은 고딕"/>
+              </a:rPr>
+              <a:t>  MonolithFirst, Martin Fowler, martinfowler.com, 2015, https://martinfowler.com/bliki/MonolithFirst.html</a:t>
+            </a:r>
+          </a:p>
+          <a:p>
+            <a:pPr lvl="2" marL="146685" indent="-146685">
+              <a:spcBef>
+                <a:spcPts val="100"/>
+              </a:spcBef>
+              <a:spcAft>
+                <a:spcPts val="100"/>
+              </a:spcAft>
+              <a:buNone/>
+            </a:pPr>
+            <a:r>
+              <a:rPr sz="700" b="0">
+                <a:solidFill>
+                  <a:srgbClr val="000000"/>
+                </a:solidFill>
+                <a:latin typeface="맑은 고딕"/>
+                <a:ea typeface="맑은 고딕"/>
+              </a:rPr>
+              <a:t>24. </a:t>
+            </a:r>
+            <a:r>
+              <a:rPr sz="700" b="1">
+                <a:solidFill>
+                  <a:srgbClr val="000000"/>
+                </a:solidFill>
+                <a:latin typeface="맑은 고딕"/>
+                <a:ea typeface="맑은 고딕"/>
+              </a:rPr>
+              <a:t>[Fowler 2025]</a:t>
+            </a:r>
+            <a:r>
+              <a:rPr sz="700" b="0">
+                <a:solidFill>
+                  <a:srgbClr val="000000"/>
+                </a:solidFill>
+                <a:latin typeface="맑은 고딕"/>
+                <a:ea typeface="맑은 고딕"/>
+              </a:rPr>
+              <a:t>  LLMs bring new nature of abstraction, Martin Fowler, martinfowler.com, 2025, https://martinfowler.com/articles/2025-nature-abstraction.html </a:t>
+            </a:r>
+            <a:r>
+              <a:rPr sz="700" b="0">
+                <a:solidFill>
+                  <a:srgbClr val="000000"/>
+                </a:solidFill>
+                <a:latin typeface="맑은 고딕"/>
+                <a:ea typeface="맑은 고딕"/>
+              </a:rPr>
+              <a:t>(읽을거리)</a:t>
+            </a:r>
+          </a:p>
+          <a:p>
+            <a:pPr lvl="2" marL="146685" indent="-146685">
+              <a:spcBef>
+                <a:spcPts val="100"/>
+              </a:spcBef>
+              <a:spcAft>
+                <a:spcPts val="100"/>
+              </a:spcAft>
+              <a:buNone/>
+            </a:pPr>
+            <a:r>
+              <a:rPr sz="700" b="0">
+                <a:solidFill>
+                  <a:srgbClr val="000000"/>
+                </a:solidFill>
+                <a:latin typeface="맑은 고딕"/>
+                <a:ea typeface="맑은 고딕"/>
+              </a:rPr>
+              <a:t>25. </a:t>
+            </a:r>
+            <a:r>
+              <a:rPr sz="700" b="1">
+                <a:solidFill>
+                  <a:srgbClr val="000000"/>
+                </a:solidFill>
+                <a:latin typeface="맑은 고딕"/>
+                <a:ea typeface="맑은 고딕"/>
+              </a:rPr>
+              <a:t>[Gao 외 2025]</a:t>
+            </a:r>
+            <a:r>
+              <a:rPr sz="700" b="0">
+                <a:solidFill>
+                  <a:srgbClr val="000000"/>
+                </a:solidFill>
+                <a:latin typeface="맑은 고딕"/>
+                <a:ea typeface="맑은 고딕"/>
+              </a:rPr>
+              <a:t>  The Current Challenges of Software Engineering in the Era of Large Language Models, Cuiyun Gao·Xing Hu·Shan Gao·Xin Xia·Zhi Jin, ACM Transactions on Software Engineering and Methodology 34</a:t>
+            </a:r>
+            <a:r>
+              <a:rPr sz="700" b="0">
+                <a:solidFill>
+                  <a:srgbClr val="000000"/>
+                </a:solidFill>
+                <a:latin typeface="맑은 고딕"/>
+                <a:ea typeface="맑은 고딕"/>
+              </a:rPr>
+              <a:t>(5)</a:t>
+            </a:r>
+            <a:r>
+              <a:rPr sz="700" b="0">
+                <a:solidFill>
+                  <a:srgbClr val="000000"/>
+                </a:solidFill>
+                <a:latin typeface="맑은 고딕"/>
+                <a:ea typeface="맑은 고딕"/>
+              </a:rPr>
+              <a:t>, 2025, https://doi.org/10.1145/3712005</a:t>
+            </a:r>
+          </a:p>
+          <a:p>
+            <a:pPr lvl="2" marL="146685" indent="-146685">
+              <a:spcBef>
+                <a:spcPts val="100"/>
+              </a:spcBef>
+              <a:spcAft>
+                <a:spcPts val="100"/>
+              </a:spcAft>
+              <a:buNone/>
+            </a:pPr>
+            <a:r>
+              <a:rPr sz="700" b="0">
+                <a:solidFill>
+                  <a:srgbClr val="000000"/>
+                </a:solidFill>
+                <a:latin typeface="맑은 고딕"/>
+                <a:ea typeface="맑은 고딕"/>
+              </a:rPr>
+              <a:t>26. </a:t>
+            </a:r>
+            <a:r>
+              <a:rPr sz="700" b="1">
+                <a:solidFill>
+                  <a:srgbClr val="000000"/>
+                </a:solidFill>
+                <a:latin typeface="맑은 고딕"/>
+                <a:ea typeface="맑은 고딕"/>
+              </a:rPr>
+              <a:t>[GitHub Spec Kit]</a:t>
+            </a:r>
+            <a:r>
+              <a:rPr sz="700" b="0">
+                <a:solidFill>
+                  <a:srgbClr val="000000"/>
+                </a:solidFill>
+                <a:latin typeface="맑은 고딕"/>
+                <a:ea typeface="맑은 고딕"/>
+              </a:rPr>
+              <a:t>  Spec Kit, GitHub, https://github.com/github/spec-kit </a:t>
+            </a:r>
+            <a:r>
+              <a:rPr sz="700" b="0">
+                <a:solidFill>
+                  <a:srgbClr val="000000"/>
+                </a:solidFill>
+                <a:latin typeface="맑은 고딕"/>
+                <a:ea typeface="맑은 고딕"/>
+              </a:rPr>
+              <a:t>(읽을거리)</a:t>
+            </a:r>
+          </a:p>
+          <a:p>
+            <a:pPr lvl="2" marL="146685" indent="-146685">
+              <a:spcBef>
+                <a:spcPts val="100"/>
+              </a:spcBef>
+              <a:spcAft>
+                <a:spcPts val="100"/>
+              </a:spcAft>
+              <a:buNone/>
+            </a:pPr>
+            <a:r>
+              <a:rPr sz="700" b="0">
+                <a:solidFill>
+                  <a:srgbClr val="000000"/>
+                </a:solidFill>
+                <a:latin typeface="맑은 고딕"/>
+                <a:ea typeface="맑은 고딕"/>
+              </a:rPr>
+              <a:t>27. </a:t>
+            </a:r>
+            <a:r>
+              <a:rPr sz="700" b="1">
+                <a:solidFill>
+                  <a:srgbClr val="000000"/>
+                </a:solidFill>
+                <a:latin typeface="맑은 고딕"/>
+                <a:ea typeface="맑은 고딕"/>
+              </a:rPr>
+              <a:t>[Gruber 1993]</a:t>
+            </a:r>
+            <a:r>
+              <a:rPr sz="700" b="0">
+                <a:solidFill>
+                  <a:srgbClr val="000000"/>
+                </a:solidFill>
+                <a:latin typeface="맑은 고딕"/>
+                <a:ea typeface="맑은 고딕"/>
+              </a:rPr>
+              <a:t>  A Translation Approach to Portable Ontology Specifications, Thomas R. Gruber, Knowledge Acquisition 5</a:t>
+            </a:r>
+            <a:r>
+              <a:rPr sz="700" b="0">
+                <a:solidFill>
+                  <a:srgbClr val="000000"/>
+                </a:solidFill>
+                <a:latin typeface="맑은 고딕"/>
+                <a:ea typeface="맑은 고딕"/>
+              </a:rPr>
+              <a:t>(2)</a:t>
+            </a:r>
+            <a:r>
+              <a:rPr sz="700" b="0">
+                <a:solidFill>
+                  <a:srgbClr val="000000"/>
+                </a:solidFill>
+                <a:latin typeface="맑은 고딕"/>
+                <a:ea typeface="맑은 고딕"/>
+              </a:rPr>
+              <a:t>, 1993</a:t>
+            </a:r>
+          </a:p>
+          <a:p>
+            <a:pPr lvl="2" marL="146685" indent="-146685">
+              <a:spcBef>
+                <a:spcPts val="100"/>
+              </a:spcBef>
+              <a:spcAft>
+                <a:spcPts val="100"/>
+              </a:spcAft>
+              <a:buNone/>
+            </a:pPr>
+            <a:r>
+              <a:rPr sz="700" b="0">
+                <a:solidFill>
+                  <a:srgbClr val="000000"/>
+                </a:solidFill>
+                <a:latin typeface="맑은 고딕"/>
+                <a:ea typeface="맑은 고딕"/>
+              </a:rPr>
+              <a:t>28. </a:t>
+            </a:r>
+            <a:r>
+              <a:rPr sz="700" b="1">
+                <a:solidFill>
+                  <a:srgbClr val="000000"/>
+                </a:solidFill>
+                <a:latin typeface="맑은 고딕"/>
+                <a:ea typeface="맑은 고딕"/>
+              </a:rPr>
+              <a:t>[Hassan 외 2026]</a:t>
+            </a:r>
+            <a:r>
+              <a:rPr sz="700" b="0">
+                <a:solidFill>
+                  <a:srgbClr val="000000"/>
+                </a:solidFill>
+                <a:latin typeface="맑은 고딕"/>
+                <a:ea typeface="맑은 고딕"/>
+              </a:rPr>
+              <a:t>  Towards AI-Native Software Engineering </a:t>
+            </a:r>
+            <a:r>
+              <a:rPr sz="700" b="0">
+                <a:solidFill>
+                  <a:srgbClr val="000000"/>
+                </a:solidFill>
+                <a:latin typeface="맑은 고딕"/>
+                <a:ea typeface="맑은 고딕"/>
+              </a:rPr>
+              <a:t>(SE 3.0)</a:t>
+            </a:r>
+            <a:r>
+              <a:rPr sz="700" b="0">
+                <a:solidFill>
+                  <a:srgbClr val="000000"/>
+                </a:solidFill>
+                <a:latin typeface="맑은 고딕"/>
+                <a:ea typeface="맑은 고딕"/>
+              </a:rPr>
+              <a:t> —</a:t>
+            </a:r>
+            <a:r>
+              <a:rPr sz="700" b="0">
+                <a:solidFill>
+                  <a:srgbClr val="000000"/>
+                </a:solidFill>
+                <a:latin typeface="맑은 고딕"/>
+                <a:ea typeface="맑은 고딕"/>
+              </a:rPr>
+              <a:t> A Vision and a Challenge Roadmap, Ahmed E. Hassan·Gustavo A. Oliva·Dayi Lin·Boyuan Chen·Zhen Ming </a:t>
+            </a:r>
             <a:r>
               <a:rPr sz="800" b="0">
                 <a:solidFill>
@@ -2546,17 +3267,17 @@
                 <a:latin typeface="맑은 고딕"/>
                 <a:ea typeface="맑은 고딕"/>
               </a:rPr>
-              <a:t>14. </a:t>
-            </a:r>
-            <a:r>
-              <a:rPr sz="800" b="1">
-                <a:solidFill>
-                  <a:srgbClr val="000000"/>
-                </a:solidFill>
-                <a:latin typeface="맑은 고딕"/>
-                <a:ea typeface="맑은 고딕"/>
-              </a:rPr>
-              <a:t>[Böckeler 2025]</a:t>
+              <a:t>(Jack)</a:t>
+            </a:r>
+            <a:r>
+              <a:rPr sz="700" b="0">
+                <a:solidFill>
+                  <a:srgbClr val="000000"/>
+                </a:solidFill>
+                <a:latin typeface="맑은 고딕"/>
+                <a:ea typeface="맑은 고딕"/>
+              </a:rPr>
+              <a:t> Jiang, ACM Transactions on Software Engineering and Methodology 35</a:t>
             </a:r>
             <a:r>
               <a:rPr sz="800" b="0">
@@ -2566,488 +3287,783 @@
                 <a:latin typeface="맑은 고딕"/>
                 <a:ea typeface="맑은 고딕"/>
               </a:rPr>
-              <a:t>  Understanding Spec-Driven-Development: Kiro, spec-kit, and Tessl, Birgitta Böckeler, martinfowler.com, 2025, https://martinfowler.com/articles/exploring-gen-ai/sdd-3-tools.html</a:t>
-            </a:r>
-          </a:p>
-          <a:p>
-            <a:pPr lvl="2" marL="167640" indent="-167640">
-              <a:spcBef>
-                <a:spcPts val="100"/>
-              </a:spcBef>
-              <a:spcAft>
-                <a:spcPts val="100"/>
-              </a:spcAft>
-              <a:buNone/>
-            </a:pPr>
-            <a:r>
-              <a:rPr sz="800" b="0">
-                <a:solidFill>
-                  <a:srgbClr val="000000"/>
-                </a:solidFill>
-                <a:latin typeface="맑은 고딕"/>
-                <a:ea typeface="맑은 고딕"/>
-              </a:rPr>
-              <a:t>15. </a:t>
-            </a:r>
-            <a:r>
-              <a:rPr sz="800" b="1">
-                <a:solidFill>
-                  <a:srgbClr val="000000"/>
-                </a:solidFill>
-                <a:latin typeface="맑은 고딕"/>
-                <a:ea typeface="맑은 고딕"/>
-              </a:rPr>
-              <a:t>[Böckeler 2026a]</a:t>
-            </a:r>
-            <a:r>
-              <a:rPr sz="800" b="0">
-                <a:solidFill>
-                  <a:srgbClr val="000000"/>
-                </a:solidFill>
-                <a:latin typeface="맑은 고딕"/>
-                <a:ea typeface="맑은 고딕"/>
-              </a:rPr>
-              <a:t>  Harness engineering for coding agent users, Birgitta Böckeler, martinfowler.com, 2026, https://martinfowler.com/articles/exploring-gen-ai/harness-engineering.html</a:t>
-            </a:r>
-          </a:p>
-          <a:p>
-            <a:pPr lvl="2" marL="167640" indent="-167640">
-              <a:spcBef>
-                <a:spcPts val="100"/>
-              </a:spcBef>
-              <a:spcAft>
-                <a:spcPts val="100"/>
-              </a:spcAft>
-              <a:buNone/>
-            </a:pPr>
-            <a:r>
-              <a:rPr sz="800" b="0">
-                <a:solidFill>
-                  <a:srgbClr val="000000"/>
-                </a:solidFill>
-                <a:latin typeface="맑은 고딕"/>
-                <a:ea typeface="맑은 고딕"/>
-              </a:rPr>
-              <a:t>16. </a:t>
-            </a:r>
-            <a:r>
-              <a:rPr sz="800" b="1">
-                <a:solidFill>
-                  <a:srgbClr val="000000"/>
-                </a:solidFill>
-                <a:latin typeface="맑은 고딕"/>
-                <a:ea typeface="맑은 고딕"/>
-              </a:rPr>
-              <a:t>[Böckeler 2026b]</a:t>
-            </a:r>
-            <a:r>
-              <a:rPr sz="800" b="0">
-                <a:solidFill>
-                  <a:srgbClr val="000000"/>
-                </a:solidFill>
-                <a:latin typeface="맑은 고딕"/>
-                <a:ea typeface="맑은 고딕"/>
-              </a:rPr>
-              <a:t>  Maintainability sensors for coding agents, Birgitta Böckeler, martinfowler.com, 2026, https://martinfowler.com/articles/sensors-for-coding-agents.html</a:t>
-            </a:r>
-          </a:p>
-          <a:p>
-            <a:pPr lvl="2" marL="167640" indent="-167640">
-              <a:spcBef>
-                <a:spcPts val="100"/>
-              </a:spcBef>
-              <a:spcAft>
-                <a:spcPts val="100"/>
-              </a:spcAft>
-              <a:buNone/>
-            </a:pPr>
-            <a:r>
-              <a:rPr sz="800" b="0">
-                <a:solidFill>
-                  <a:srgbClr val="000000"/>
-                </a:solidFill>
-                <a:latin typeface="맑은 고딕"/>
-                <a:ea typeface="맑은 고딕"/>
-              </a:rPr>
-              <a:t>17. </a:t>
-            </a:r>
-            <a:r>
-              <a:rPr sz="800" b="1">
-                <a:solidFill>
-                  <a:srgbClr val="000000"/>
-                </a:solidFill>
-                <a:latin typeface="맑은 고딕"/>
-                <a:ea typeface="맑은 고딕"/>
-              </a:rPr>
-              <a:t>[Chen 1976]</a:t>
-            </a:r>
-            <a:r>
-              <a:rPr sz="800" b="0">
-                <a:solidFill>
-                  <a:srgbClr val="000000"/>
-                </a:solidFill>
-                <a:latin typeface="맑은 고딕"/>
-                <a:ea typeface="맑은 고딕"/>
-              </a:rPr>
-              <a:t>  The Entity-Relationship Model —</a:t>
-            </a:r>
-            <a:r>
-              <a:rPr sz="800" b="0">
-                <a:solidFill>
-                  <a:srgbClr val="000000"/>
-                </a:solidFill>
-                <a:latin typeface="맑은 고딕"/>
-                <a:ea typeface="맑은 고딕"/>
-              </a:rPr>
-              <a:t> Toward a Unified View of Data, Peter Pin-Shan Chen, ACM Transactions on Database Systems, 1976, https://www.csc.lsu.edu/~chen/pdf/erd-5-pages.pdf</a:t>
-            </a:r>
-          </a:p>
-          <a:p>
-            <a:pPr lvl="2" marL="167640" indent="-167640">
-              <a:spcBef>
-                <a:spcPts val="100"/>
-              </a:spcBef>
-              <a:spcAft>
-                <a:spcPts val="100"/>
-              </a:spcAft>
-              <a:buNone/>
-            </a:pPr>
-            <a:r>
-              <a:rPr sz="800" b="0">
-                <a:solidFill>
-                  <a:srgbClr val="000000"/>
-                </a:solidFill>
-                <a:latin typeface="맑은 고딕"/>
-                <a:ea typeface="맑은 고딕"/>
-              </a:rPr>
-              <a:t>18. </a:t>
-            </a:r>
-            <a:r>
-              <a:rPr sz="800" b="1">
-                <a:solidFill>
-                  <a:srgbClr val="000000"/>
-                </a:solidFill>
-                <a:latin typeface="맑은 고딕"/>
-                <a:ea typeface="맑은 고딕"/>
-              </a:rPr>
-              <a:t>[Cockburn 2005]</a:t>
-            </a:r>
-            <a:r>
-              <a:rPr sz="800" b="0">
-                <a:solidFill>
-                  <a:srgbClr val="000000"/>
-                </a:solidFill>
-                <a:latin typeface="맑은 고딕"/>
-                <a:ea typeface="맑은 고딕"/>
-              </a:rPr>
-              <a:t>  Hexagonal architecture, Alistair Cockburn, 2005, https://alistair.cockburn.us/hexagonal-architecture/</a:t>
-            </a:r>
-          </a:p>
-          <a:p>
-            <a:pPr lvl="2" marL="167640" indent="-167640">
-              <a:spcBef>
-                <a:spcPts val="100"/>
-              </a:spcBef>
-              <a:spcAft>
-                <a:spcPts val="100"/>
-              </a:spcAft>
-              <a:buNone/>
-            </a:pPr>
-            <a:r>
-              <a:rPr sz="800" b="0">
-                <a:solidFill>
-                  <a:srgbClr val="000000"/>
-                </a:solidFill>
-                <a:latin typeface="맑은 고딕"/>
-                <a:ea typeface="맑은 고딕"/>
-              </a:rPr>
-              <a:t>19. </a:t>
-            </a:r>
-            <a:r>
-              <a:rPr sz="800" b="1">
-                <a:solidFill>
-                  <a:srgbClr val="000000"/>
-                </a:solidFill>
-                <a:latin typeface="맑은 고딕"/>
-                <a:ea typeface="맑은 고딕"/>
-              </a:rPr>
-              <a:t>[Cucumber]</a:t>
-            </a:r>
-            <a:r>
-              <a:rPr sz="800" b="0">
-                <a:solidFill>
-                  <a:srgbClr val="000000"/>
-                </a:solidFill>
-                <a:latin typeface="맑은 고딕"/>
-                <a:ea typeface="맑은 고딕"/>
-              </a:rPr>
-              <a:t>  Behaviour-Driven Development, Cucumber, https://cucumber.io/docs/bdd/</a:t>
-            </a:r>
-          </a:p>
-          <a:p>
-            <a:pPr lvl="2" marL="167640" indent="-167640">
-              <a:spcBef>
-                <a:spcPts val="100"/>
-              </a:spcBef>
-              <a:spcAft>
-                <a:spcPts val="100"/>
-              </a:spcAft>
-              <a:buNone/>
-            </a:pPr>
-            <a:r>
-              <a:rPr sz="800" b="0">
-                <a:solidFill>
-                  <a:srgbClr val="000000"/>
-                </a:solidFill>
-                <a:latin typeface="맑은 고딕"/>
-                <a:ea typeface="맑은 고딕"/>
-              </a:rPr>
-              <a:t>20. </a:t>
-            </a:r>
-            <a:r>
-              <a:rPr sz="800" b="1">
-                <a:solidFill>
-                  <a:srgbClr val="000000"/>
-                </a:solidFill>
-                <a:latin typeface="맑은 고딕"/>
-                <a:ea typeface="맑은 고딕"/>
-              </a:rPr>
-              <a:t>[Cucumber: Example Mapping]</a:t>
-            </a:r>
-            <a:r>
-              <a:rPr sz="800" b="0">
-                <a:solidFill>
-                  <a:srgbClr val="000000"/>
-                </a:solidFill>
-                <a:latin typeface="맑은 고딕"/>
-                <a:ea typeface="맑은 고딕"/>
-              </a:rPr>
-              <a:t>  Example Mapping, Cucumber, https://cucumber.io/docs/bdd/example-mapping/</a:t>
-            </a:r>
-          </a:p>
-          <a:p>
-            <a:pPr lvl="2" marL="167640" indent="-167640">
-              <a:spcBef>
-                <a:spcPts val="100"/>
-              </a:spcBef>
-              <a:spcAft>
-                <a:spcPts val="100"/>
-              </a:spcAft>
-              <a:buNone/>
-            </a:pPr>
-            <a:r>
-              <a:rPr sz="800" b="0">
-                <a:solidFill>
-                  <a:srgbClr val="000000"/>
-                </a:solidFill>
-                <a:latin typeface="맑은 고딕"/>
-                <a:ea typeface="맑은 고딕"/>
-              </a:rPr>
-              <a:t>21. </a:t>
-            </a:r>
-            <a:r>
-              <a:rPr sz="800" b="1">
-                <a:solidFill>
-                  <a:srgbClr val="000000"/>
-                </a:solidFill>
-                <a:latin typeface="맑은 고딕"/>
-                <a:ea typeface="맑은 고딕"/>
-              </a:rPr>
-              <a:t>[DORA 2025]</a:t>
-            </a:r>
-            <a:r>
-              <a:rPr sz="800" b="0">
-                <a:solidFill>
-                  <a:srgbClr val="000000"/>
-                </a:solidFill>
-                <a:latin typeface="맑은 고딕"/>
-                <a:ea typeface="맑은 고딕"/>
-              </a:rPr>
-              <a:t>  State of AI-assisted Software Development 2025, DORA, 2025, https://dora.dev/research/2025/dora-report/</a:t>
-            </a:r>
-          </a:p>
-          <a:p>
-            <a:pPr lvl="2" marL="167640" indent="-167640">
-              <a:spcBef>
-                <a:spcPts val="100"/>
-              </a:spcBef>
-              <a:spcAft>
-                <a:spcPts val="100"/>
-              </a:spcAft>
-              <a:buNone/>
-            </a:pPr>
-            <a:r>
-              <a:rPr sz="800" b="0">
-                <a:solidFill>
-                  <a:srgbClr val="000000"/>
-                </a:solidFill>
-                <a:latin typeface="맑은 고딕"/>
-                <a:ea typeface="맑은 고딕"/>
-              </a:rPr>
-              <a:t>22. </a:t>
-            </a:r>
-            <a:r>
-              <a:rPr sz="800" b="1">
-                <a:solidFill>
-                  <a:srgbClr val="000000"/>
-                </a:solidFill>
-                <a:latin typeface="맑은 고딕"/>
-                <a:ea typeface="맑은 고딕"/>
-              </a:rPr>
-              <a:t>[Evans 2015]</a:t>
-            </a:r>
-            <a:r>
-              <a:rPr sz="800" b="0">
-                <a:solidFill>
-                  <a:srgbClr val="000000"/>
-                </a:solidFill>
-                <a:latin typeface="맑은 고딕"/>
-                <a:ea typeface="맑은 고딕"/>
-              </a:rPr>
-              <a:t>  Domain-Driven Design Reference, Eric Evans, Domain Language, 2015, https://www.domainlanguage.com/wp-content/uploads/2016/05/DDD_Reference_2015-03.pdf</a:t>
-            </a:r>
-          </a:p>
-          <a:p>
-            <a:pPr lvl="2" marL="167640" indent="-167640">
-              <a:spcBef>
-                <a:spcPts val="100"/>
-              </a:spcBef>
-              <a:spcAft>
-                <a:spcPts val="100"/>
-              </a:spcAft>
-              <a:buNone/>
-            </a:pPr>
-            <a:r>
-              <a:rPr sz="800" b="0">
-                <a:solidFill>
-                  <a:srgbClr val="000000"/>
-                </a:solidFill>
-                <a:latin typeface="맑은 고딕"/>
-                <a:ea typeface="맑은 고딕"/>
-              </a:rPr>
-              <a:t>23. </a:t>
-            </a:r>
-            <a:r>
-              <a:rPr sz="800" b="1">
-                <a:solidFill>
-                  <a:srgbClr val="000000"/>
-                </a:solidFill>
-                <a:latin typeface="맑은 고딕"/>
-                <a:ea typeface="맑은 고딕"/>
-              </a:rPr>
-              <a:t>[Fowler 2015c]</a:t>
-            </a:r>
-            <a:r>
-              <a:rPr sz="800" b="0">
-                <a:solidFill>
-                  <a:srgbClr val="000000"/>
-                </a:solidFill>
-                <a:latin typeface="맑은 고딕"/>
-                <a:ea typeface="맑은 고딕"/>
-              </a:rPr>
-              <a:t>  MonolithFirst, Martin Fowler, martinfowler.com, 2015, https://martinfowler.com/bliki/MonolithFirst.html</a:t>
-            </a:r>
-          </a:p>
-          <a:p>
-            <a:pPr lvl="2" marL="167640" indent="-167640">
-              <a:spcBef>
-                <a:spcPts val="100"/>
-              </a:spcBef>
-              <a:spcAft>
-                <a:spcPts val="100"/>
-              </a:spcAft>
-              <a:buNone/>
-            </a:pPr>
-            <a:r>
-              <a:rPr sz="800" b="0">
-                <a:solidFill>
-                  <a:srgbClr val="000000"/>
-                </a:solidFill>
-                <a:latin typeface="맑은 고딕"/>
-                <a:ea typeface="맑은 고딕"/>
-              </a:rPr>
-              <a:t>24. </a:t>
-            </a:r>
-            <a:r>
-              <a:rPr sz="800" b="1">
-                <a:solidFill>
-                  <a:srgbClr val="000000"/>
-                </a:solidFill>
-                <a:latin typeface="맑은 고딕"/>
-                <a:ea typeface="맑은 고딕"/>
-              </a:rPr>
-              <a:t>[Fowler 2025]</a:t>
-            </a:r>
-            <a:r>
-              <a:rPr sz="800" b="0">
-                <a:solidFill>
-                  <a:srgbClr val="000000"/>
-                </a:solidFill>
-                <a:latin typeface="맑은 고딕"/>
-                <a:ea typeface="맑은 고딕"/>
-              </a:rPr>
-              <a:t>  LLMs bring new nature of abstraction, Martin Fowler, martinfowler.com, 2025, https://martinfowler.com/articles/2025-nature-abstraction.html</a:t>
-            </a:r>
-          </a:p>
-          <a:p>
-            <a:pPr lvl="2" marL="167640" indent="-167640">
-              <a:spcBef>
-                <a:spcPts val="100"/>
-              </a:spcBef>
-              <a:spcAft>
-                <a:spcPts val="100"/>
-              </a:spcAft>
-              <a:buNone/>
-            </a:pPr>
-            <a:r>
-              <a:rPr sz="800" b="0">
-                <a:solidFill>
-                  <a:srgbClr val="000000"/>
-                </a:solidFill>
-                <a:latin typeface="맑은 고딕"/>
-                <a:ea typeface="맑은 고딕"/>
-              </a:rPr>
-              <a:t>25. </a:t>
-            </a:r>
-            <a:r>
-              <a:rPr sz="800" b="1">
-                <a:solidFill>
-                  <a:srgbClr val="000000"/>
-                </a:solidFill>
-                <a:latin typeface="맑은 고딕"/>
-                <a:ea typeface="맑은 고딕"/>
-              </a:rPr>
-              <a:t>[Gao 외 2025]</a:t>
-            </a:r>
-            <a:r>
-              <a:rPr sz="800" b="0">
-                <a:solidFill>
-                  <a:srgbClr val="000000"/>
-                </a:solidFill>
-                <a:latin typeface="맑은 고딕"/>
-                <a:ea typeface="맑은 고딕"/>
-              </a:rPr>
-              <a:t>  The Current Challenges of Software Engineering in the Era of Large Language Models, Cuiyun Gao·Xing Hu·Shan Gao·Xin Xia·Zhi Jin, ACM Transactions on Software Engineering and Methodology 34</a:t>
-            </a:r>
-            <a:r>
-              <a:rPr sz="800" b="0">
-                <a:solidFill>
-                  <a:srgbClr val="000000"/>
-                </a:solidFill>
-                <a:latin typeface="맑은 고딕"/>
-                <a:ea typeface="맑은 고딕"/>
-              </a:rPr>
-              <a:t>(5)</a:t>
-            </a:r>
-            <a:r>
-              <a:rPr sz="800" b="0">
-                <a:solidFill>
-                  <a:srgbClr val="000000"/>
-                </a:solidFill>
-                <a:latin typeface="맑은 고딕"/>
-                <a:ea typeface="맑은 고딕"/>
-              </a:rPr>
-              <a:t>, 2025, https://doi.org/10.1145/3712005</a:t>
+              <a:t>(9)</a:t>
+            </a:r>
+            <a:r>
+              <a:rPr sz="700" b="0">
+                <a:solidFill>
+                  <a:srgbClr val="000000"/>
+                </a:solidFill>
+                <a:latin typeface="맑은 고딕"/>
+                <a:ea typeface="맑은 고딕"/>
+              </a:rPr>
+              <a:t>, 2026, https://doi.org/10.1145/3807901</a:t>
+            </a:r>
+          </a:p>
+          <a:p>
+            <a:pPr lvl="2" marL="146685" indent="-146685">
+              <a:spcBef>
+                <a:spcPts val="100"/>
+              </a:spcBef>
+              <a:spcAft>
+                <a:spcPts val="100"/>
+              </a:spcAft>
+              <a:buNone/>
+            </a:pPr>
+            <a:r>
+              <a:rPr sz="700" b="0">
+                <a:solidFill>
+                  <a:srgbClr val="000000"/>
+                </a:solidFill>
+                <a:latin typeface="맑은 고딕"/>
+                <a:ea typeface="맑은 고딕"/>
+              </a:rPr>
+              <a:t>29. </a:t>
+            </a:r>
+            <a:r>
+              <a:rPr sz="700" b="1">
+                <a:solidFill>
+                  <a:srgbClr val="000000"/>
+                </a:solidFill>
+                <a:latin typeface="맑은 고딕"/>
+                <a:ea typeface="맑은 고딕"/>
+              </a:rPr>
+              <a:t>[Jeffries 2001]</a:t>
+            </a:r>
+            <a:r>
+              <a:rPr sz="700" b="0">
+                <a:solidFill>
+                  <a:srgbClr val="000000"/>
+                </a:solidFill>
+                <a:latin typeface="맑은 고딕"/>
+                <a:ea typeface="맑은 고딕"/>
+              </a:rPr>
+              <a:t>  Essential XP: Card, Conversation, Confirmation, Ron Jeffries, 2001, https://ronjeffries.com/xprog/articles/expcardconversationconfirmation/</a:t>
+            </a:r>
+          </a:p>
+          <a:p>
+            <a:pPr lvl="2" marL="146685" indent="-146685">
+              <a:spcBef>
+                <a:spcPts val="100"/>
+              </a:spcBef>
+              <a:spcAft>
+                <a:spcPts val="100"/>
+              </a:spcAft>
+              <a:buNone/>
+            </a:pPr>
+            <a:r>
+              <a:rPr sz="700" b="0">
+                <a:solidFill>
+                  <a:srgbClr val="000000"/>
+                </a:solidFill>
+                <a:latin typeface="맑은 고딕"/>
+                <a:ea typeface="맑은 고딕"/>
+              </a:rPr>
+              <a:t>30. </a:t>
+            </a:r>
+            <a:r>
+              <a:rPr sz="700" b="1">
+                <a:solidFill>
+                  <a:srgbClr val="000000"/>
+                </a:solidFill>
+                <a:latin typeface="맑은 고딕"/>
+                <a:ea typeface="맑은 고딕"/>
+              </a:rPr>
+              <a:t>[Karpathy 2025]</a:t>
+            </a:r>
+            <a:r>
+              <a:rPr sz="700" b="0">
+                <a:solidFill>
+                  <a:srgbClr val="000000"/>
+                </a:solidFill>
+                <a:latin typeface="맑은 고딕"/>
+                <a:ea typeface="맑은 고딕"/>
+              </a:rPr>
+              <a:t>  Software Is Changing </a:t>
+            </a:r>
+            <a:r>
+              <a:rPr sz="700" b="0">
+                <a:solidFill>
+                  <a:srgbClr val="000000"/>
+                </a:solidFill>
+                <a:latin typeface="맑은 고딕"/>
+                <a:ea typeface="맑은 고딕"/>
+              </a:rPr>
+              <a:t>(Again)</a:t>
+            </a:r>
+            <a:r>
+              <a:rPr sz="700" b="0">
+                <a:solidFill>
+                  <a:srgbClr val="000000"/>
+                </a:solidFill>
+                <a:latin typeface="맑은 고딕"/>
+                <a:ea typeface="맑은 고딕"/>
+              </a:rPr>
+              <a:t>, Andrej Karpathy, Y Combinator, 2025, https://www.ycombinator.com/library/MW-andrej-karpathy-software-is-changing-again </a:t>
+            </a:r>
+            <a:r>
+              <a:rPr sz="700" b="0">
+                <a:solidFill>
+                  <a:srgbClr val="000000"/>
+                </a:solidFill>
+                <a:latin typeface="맑은 고딕"/>
+                <a:ea typeface="맑은 고딕"/>
+              </a:rPr>
+              <a:t>(읽을거리)</a:t>
+            </a:r>
+          </a:p>
+          <a:p>
+            <a:pPr lvl="2" marL="146685" indent="-146685">
+              <a:spcBef>
+                <a:spcPts val="100"/>
+              </a:spcBef>
+              <a:spcAft>
+                <a:spcPts val="100"/>
+              </a:spcAft>
+              <a:buNone/>
+            </a:pPr>
+            <a:r>
+              <a:rPr sz="700" b="0">
+                <a:solidFill>
+                  <a:srgbClr val="000000"/>
+                </a:solidFill>
+                <a:latin typeface="맑은 고딕"/>
+                <a:ea typeface="맑은 고딕"/>
+              </a:rPr>
+              <a:t>31. </a:t>
+            </a:r>
+            <a:r>
+              <a:rPr sz="700" b="1">
+                <a:solidFill>
+                  <a:srgbClr val="000000"/>
+                </a:solidFill>
+                <a:latin typeface="맑은 고딕"/>
+                <a:ea typeface="맑은 고딕"/>
+              </a:rPr>
+              <a:t>[Larman 2004]</a:t>
+            </a:r>
+            <a:r>
+              <a:rPr sz="700" b="0">
+                <a:solidFill>
+                  <a:srgbClr val="000000"/>
+                </a:solidFill>
+                <a:latin typeface="맑은 고딕"/>
+                <a:ea typeface="맑은 고딕"/>
+              </a:rPr>
+              <a:t>  Applying UML and Patterns, 3rd ed., Craig Larman, Prentice Hall, 2004</a:t>
+            </a:r>
+          </a:p>
+          <a:p>
+            <a:pPr lvl="2" marL="146685" indent="-146685">
+              <a:spcBef>
+                <a:spcPts val="100"/>
+              </a:spcBef>
+              <a:spcAft>
+                <a:spcPts val="100"/>
+              </a:spcAft>
+              <a:buNone/>
+            </a:pPr>
+            <a:r>
+              <a:rPr sz="700" b="0">
+                <a:solidFill>
+                  <a:srgbClr val="000000"/>
+                </a:solidFill>
+                <a:latin typeface="맑은 고딕"/>
+                <a:ea typeface="맑은 고딕"/>
+              </a:rPr>
+              <a:t>32. </a:t>
+            </a:r>
+            <a:r>
+              <a:rPr sz="700" b="1">
+                <a:solidFill>
+                  <a:srgbClr val="000000"/>
+                </a:solidFill>
+                <a:latin typeface="맑은 고딕"/>
+                <a:ea typeface="맑은 고딕"/>
+              </a:rPr>
+              <a:t>[Lewis·Fowler 2014]</a:t>
+            </a:r>
+            <a:r>
+              <a:rPr sz="700" b="0">
+                <a:solidFill>
+                  <a:srgbClr val="000000"/>
+                </a:solidFill>
+                <a:latin typeface="맑은 고딕"/>
+                <a:ea typeface="맑은 고딕"/>
+              </a:rPr>
+              <a:t>  Microservices, James Lewis·Martin Fowler, martinfowler.com, 2014, https://martinfowler.com/articles/microservices.html</a:t>
+            </a:r>
+          </a:p>
+          <a:p>
+            <a:pPr lvl="2" marL="146685" indent="-146685">
+              <a:spcBef>
+                <a:spcPts val="100"/>
+              </a:spcBef>
+              <a:spcAft>
+                <a:spcPts val="100"/>
+              </a:spcAft>
+              <a:buNone/>
+            </a:pPr>
+            <a:r>
+              <a:rPr sz="700" b="0">
+                <a:solidFill>
+                  <a:srgbClr val="000000"/>
+                </a:solidFill>
+                <a:latin typeface="맑은 고딕"/>
+                <a:ea typeface="맑은 고딕"/>
+              </a:rPr>
+              <a:t>33. </a:t>
+            </a:r>
+            <a:r>
+              <a:rPr sz="700" b="1">
+                <a:solidFill>
+                  <a:srgbClr val="000000"/>
+                </a:solidFill>
+                <a:latin typeface="맑은 고딕"/>
+                <a:ea typeface="맑은 고딕"/>
+              </a:rPr>
+              <a:t>[Lopopolo 2026]</a:t>
+            </a:r>
+            <a:r>
+              <a:rPr sz="700" b="0">
+                <a:solidFill>
+                  <a:srgbClr val="000000"/>
+                </a:solidFill>
+                <a:latin typeface="맑은 고딕"/>
+                <a:ea typeface="맑은 고딕"/>
+              </a:rPr>
+              <a:t>  Harness engineering: leveraging Codex in an agent-first world, Ryan Lopopolo, OpenAI, 2026, https://openai.com/index/harness-engineering/</a:t>
+            </a:r>
+          </a:p>
+          <a:p>
+            <a:pPr lvl="2" marL="146685" indent="-146685">
+              <a:spcBef>
+                <a:spcPts val="100"/>
+              </a:spcBef>
+              <a:spcAft>
+                <a:spcPts val="100"/>
+              </a:spcAft>
+              <a:buNone/>
+            </a:pPr>
+            <a:r>
+              <a:rPr sz="700" b="0">
+                <a:solidFill>
+                  <a:srgbClr val="000000"/>
+                </a:solidFill>
+                <a:latin typeface="맑은 고딕"/>
+                <a:ea typeface="맑은 고딕"/>
+              </a:rPr>
+              <a:t>34. </a:t>
+            </a:r>
+            <a:r>
+              <a:rPr sz="700" b="1">
+                <a:solidFill>
+                  <a:srgbClr val="000000"/>
+                </a:solidFill>
+                <a:latin typeface="맑은 고딕"/>
+                <a:ea typeface="맑은 고딕"/>
+              </a:rPr>
+              <a:t>[Martin 2000]</a:t>
+            </a:r>
+            <a:r>
+              <a:rPr sz="700" b="0">
+                <a:solidFill>
+                  <a:srgbClr val="000000"/>
+                </a:solidFill>
+                <a:latin typeface="맑은 고딕"/>
+                <a:ea typeface="맑은 고딕"/>
+              </a:rPr>
+              <a:t>  Design Principles and Design Patterns, Robert C. Martin, 2000, https://staff.cs.utu.fi/~jounsmed/doos_06/material/DesignPrinciplesAndPatterns.pdf</a:t>
+            </a:r>
+          </a:p>
+          <a:p>
+            <a:pPr lvl="2" marL="146685" indent="-146685">
+              <a:spcBef>
+                <a:spcPts val="100"/>
+              </a:spcBef>
+              <a:spcAft>
+                <a:spcPts val="100"/>
+              </a:spcAft>
+              <a:buNone/>
+            </a:pPr>
+            <a:r>
+              <a:rPr sz="700" b="0">
+                <a:solidFill>
+                  <a:srgbClr val="000000"/>
+                </a:solidFill>
+                <a:latin typeface="맑은 고딕"/>
+                <a:ea typeface="맑은 고딕"/>
+              </a:rPr>
+              <a:t>35. </a:t>
+            </a:r>
+            <a:r>
+              <a:rPr sz="700" b="1">
+                <a:solidFill>
+                  <a:srgbClr val="000000"/>
+                </a:solidFill>
+                <a:latin typeface="맑은 고딕"/>
+                <a:ea typeface="맑은 고딕"/>
+              </a:rPr>
+              <a:t>[Martin 2014]</a:t>
+            </a:r>
+            <a:r>
+              <a:rPr sz="700" b="0">
+                <a:solidFill>
+                  <a:srgbClr val="000000"/>
+                </a:solidFill>
+                <a:latin typeface="맑은 고딕"/>
+                <a:ea typeface="맑은 고딕"/>
+              </a:rPr>
+              <a:t>  The Single Responsibility Principle, Robert C. Martin, The Clean Code Blog, 2014, https://blog.cleancoder.com/uncle-bob/2014/05/08/SingleReponsibilityPrinciple.html</a:t>
+            </a:r>
+          </a:p>
+          <a:p>
+            <a:pPr lvl="2" marL="146685" indent="-146685">
+              <a:spcBef>
+                <a:spcPts val="100"/>
+              </a:spcBef>
+              <a:spcAft>
+                <a:spcPts val="100"/>
+              </a:spcAft>
+              <a:buNone/>
+            </a:pPr>
+            <a:r>
+              <a:rPr sz="700" b="0">
+                <a:solidFill>
+                  <a:srgbClr val="000000"/>
+                </a:solidFill>
+                <a:latin typeface="맑은 고딕"/>
+                <a:ea typeface="맑은 고딕"/>
+              </a:rPr>
+              <a:t>36. </a:t>
+            </a:r>
+            <a:r>
+              <a:rPr sz="700" b="1">
+                <a:solidFill>
+                  <a:srgbClr val="000000"/>
+                </a:solidFill>
+                <a:latin typeface="맑은 고딕"/>
+                <a:ea typeface="맑은 고딕"/>
+              </a:rPr>
+              <a:t>[MCP 2025]</a:t>
+            </a:r>
+            <a:r>
+              <a:rPr sz="700" b="0">
+                <a:solidFill>
+                  <a:srgbClr val="000000"/>
+                </a:solidFill>
+                <a:latin typeface="맑은 고딕"/>
+                <a:ea typeface="맑은 고딕"/>
+              </a:rPr>
+              <a:t>  Model Context Protocol Specification, 2025-06-18, https://modelcontextprotocol.io/specification/2025-06-18</a:t>
+            </a:r>
+          </a:p>
+          <a:p>
+            <a:pPr lvl="2" marL="146685" indent="-146685">
+              <a:spcBef>
+                <a:spcPts val="100"/>
+              </a:spcBef>
+              <a:spcAft>
+                <a:spcPts val="100"/>
+              </a:spcAft>
+              <a:buNone/>
+            </a:pPr>
+            <a:r>
+              <a:rPr sz="700" b="0">
+                <a:solidFill>
+                  <a:srgbClr val="000000"/>
+                </a:solidFill>
+                <a:latin typeface="맑은 고딕"/>
+                <a:ea typeface="맑은 고딕"/>
+              </a:rPr>
+              <a:t>37. </a:t>
+            </a:r>
+            <a:r>
+              <a:rPr sz="700" b="1">
+                <a:solidFill>
+                  <a:srgbClr val="000000"/>
+                </a:solidFill>
+                <a:latin typeface="맑은 고딕"/>
+                <a:ea typeface="맑은 고딕"/>
+              </a:rPr>
+              <a:t>[METR 2025]</a:t>
+            </a:r>
+            <a:r>
+              <a:rPr sz="700" b="0">
+                <a:solidFill>
+                  <a:srgbClr val="000000"/>
+                </a:solidFill>
+                <a:latin typeface="맑은 고딕"/>
+                <a:ea typeface="맑은 고딕"/>
+              </a:rPr>
+              <a:t>  Measuring the Impact of Early-2025 AI on Experienced Open-Source Developer Productivity, METR, 2025, https://metr.org/blog/2025-07-10-early-2025-ai-experienced-os-dev-study/</a:t>
+            </a:r>
+          </a:p>
+          <a:p>
+            <a:pPr lvl="2" marL="146685" indent="-146685">
+              <a:spcBef>
+                <a:spcPts val="100"/>
+              </a:spcBef>
+              <a:spcAft>
+                <a:spcPts val="100"/>
+              </a:spcAft>
+              <a:buNone/>
+            </a:pPr>
+            <a:r>
+              <a:rPr sz="700" b="0">
+                <a:solidFill>
+                  <a:srgbClr val="000000"/>
+                </a:solidFill>
+                <a:latin typeface="맑은 고딕"/>
+                <a:ea typeface="맑은 고딕"/>
+              </a:rPr>
+              <a:t>38. </a:t>
+            </a:r>
+            <a:r>
+              <a:rPr sz="700" b="1">
+                <a:solidFill>
+                  <a:srgbClr val="000000"/>
+                </a:solidFill>
+                <a:latin typeface="맑은 고딕"/>
+                <a:ea typeface="맑은 고딕"/>
+              </a:rPr>
+              <a:t>[Meyer 1992]</a:t>
+            </a:r>
+            <a:r>
+              <a:rPr sz="700" b="0">
+                <a:solidFill>
+                  <a:srgbClr val="000000"/>
+                </a:solidFill>
+                <a:latin typeface="맑은 고딕"/>
+                <a:ea typeface="맑은 고딕"/>
+              </a:rPr>
+              <a:t>  Applying "Design by Contract", Bertrand Meyer, IEEE Computer 25</a:t>
+            </a:r>
+            <a:r>
+              <a:rPr sz="700" b="0">
+                <a:solidFill>
+                  <a:srgbClr val="000000"/>
+                </a:solidFill>
+                <a:latin typeface="맑은 고딕"/>
+                <a:ea typeface="맑은 고딕"/>
+              </a:rPr>
+              <a:t>(10)</a:t>
+            </a:r>
+            <a:r>
+              <a:rPr sz="700" b="0">
+                <a:solidFill>
+                  <a:srgbClr val="000000"/>
+                </a:solidFill>
+                <a:latin typeface="맑은 고딕"/>
+                <a:ea typeface="맑은 고딕"/>
+              </a:rPr>
+              <a:t>, 1992, https://se.inf.ethz.ch/~meyer/publications/computer/contract.pdf</a:t>
+            </a:r>
+          </a:p>
+          <a:p>
+            <a:pPr lvl="2" marL="146685" indent="-146685">
+              <a:spcBef>
+                <a:spcPts val="100"/>
+              </a:spcBef>
+              <a:spcAft>
+                <a:spcPts val="100"/>
+              </a:spcAft>
+              <a:buNone/>
+            </a:pPr>
+            <a:r>
+              <a:rPr sz="700" b="0">
+                <a:solidFill>
+                  <a:srgbClr val="000000"/>
+                </a:solidFill>
+                <a:latin typeface="맑은 고딕"/>
+                <a:ea typeface="맑은 고딕"/>
+              </a:rPr>
+              <a:t>39. </a:t>
+            </a:r>
+            <a:r>
+              <a:rPr sz="700" b="1">
+                <a:solidFill>
+                  <a:srgbClr val="000000"/>
+                </a:solidFill>
+                <a:latin typeface="맑은 고딕"/>
+                <a:ea typeface="맑은 고딕"/>
+              </a:rPr>
+              <a:t>[NIST 2023]</a:t>
+            </a:r>
+            <a:r>
+              <a:rPr sz="700" b="0">
+                <a:solidFill>
+                  <a:srgbClr val="000000"/>
+                </a:solidFill>
+                <a:latin typeface="맑은 고딕"/>
+                <a:ea typeface="맑은 고딕"/>
+              </a:rPr>
+              <a:t>  Artificial Intelligence Risk Management Framework </a:t>
+            </a:r>
+            <a:r>
+              <a:rPr sz="700" b="0">
+                <a:solidFill>
+                  <a:srgbClr val="000000"/>
+                </a:solidFill>
+                <a:latin typeface="맑은 고딕"/>
+                <a:ea typeface="맑은 고딕"/>
+              </a:rPr>
+              <a:t>(AI RMF 1.0)</a:t>
+            </a:r>
+            <a:r>
+              <a:rPr sz="700" b="0">
+                <a:solidFill>
+                  <a:srgbClr val="000000"/>
+                </a:solidFill>
+                <a:latin typeface="맑은 고딕"/>
+                <a:ea typeface="맑은 고딕"/>
+              </a:rPr>
+              <a:t>, NIST AI 100-1, National Institute of Standards and Technology, 2023, https://doi.org/10.6028/NIST.AI.100-1</a:t>
+            </a:r>
+          </a:p>
+          <a:p>
+            <a:pPr lvl="2" marL="146685" indent="-146685">
+              <a:spcBef>
+                <a:spcPts val="100"/>
+              </a:spcBef>
+              <a:spcAft>
+                <a:spcPts val="100"/>
+              </a:spcAft>
+              <a:buNone/>
+            </a:pPr>
+            <a:r>
+              <a:rPr sz="700" b="0">
+                <a:solidFill>
+                  <a:srgbClr val="000000"/>
+                </a:solidFill>
+                <a:latin typeface="맑은 고딕"/>
+                <a:ea typeface="맑은 고딕"/>
+              </a:rPr>
+              <a:t>40. </a:t>
+            </a:r>
+            <a:r>
+              <a:rPr sz="700" b="1">
+                <a:solidFill>
+                  <a:srgbClr val="000000"/>
+                </a:solidFill>
+                <a:latin typeface="맑은 고딕"/>
+                <a:ea typeface="맑은 고딕"/>
+              </a:rPr>
+              <a:t>[NIST 2024]</a:t>
+            </a:r>
+            <a:r>
+              <a:rPr sz="700" b="0">
+                <a:solidFill>
+                  <a:srgbClr val="000000"/>
+                </a:solidFill>
+                <a:latin typeface="맑은 고딕"/>
+                <a:ea typeface="맑은 고딕"/>
+              </a:rPr>
+              <a:t>  Artificial Intelligence Risk Management Framework: Generative Artificial Intelligence Profile, NIST AI 600-1, National Institute of Standards and Technology, 2024, https://doi.org/10.6028/NIST.AI.600-1</a:t>
+            </a:r>
+          </a:p>
+          <a:p>
+            <a:pPr lvl="2" marL="146685" indent="-146685">
+              <a:spcBef>
+                <a:spcPts val="100"/>
+              </a:spcBef>
+              <a:spcAft>
+                <a:spcPts val="100"/>
+              </a:spcAft>
+              <a:buNone/>
+            </a:pPr>
+            <a:r>
+              <a:rPr sz="700" b="0">
+                <a:solidFill>
+                  <a:srgbClr val="000000"/>
+                </a:solidFill>
+                <a:latin typeface="맑은 고딕"/>
+                <a:ea typeface="맑은 고딕"/>
+              </a:rPr>
+              <a:t>41. </a:t>
+            </a:r>
+            <a:r>
+              <a:rPr sz="700" b="1">
+                <a:solidFill>
+                  <a:srgbClr val="000000"/>
+                </a:solidFill>
+                <a:latin typeface="맑은 고딕"/>
+                <a:ea typeface="맑은 고딕"/>
+              </a:rPr>
+              <a:t>[North 2006]</a:t>
+            </a:r>
+            <a:r>
+              <a:rPr sz="700" b="0">
+                <a:solidFill>
+                  <a:srgbClr val="000000"/>
+                </a:solidFill>
+                <a:latin typeface="맑은 고딕"/>
+                <a:ea typeface="맑은 고딕"/>
+              </a:rPr>
+              <a:t>  Introducing BDD, Dan North, 2006, https://dannorth.net/blog/introducing-bdd/</a:t>
+            </a:r>
+          </a:p>
+          <a:p>
+            <a:pPr lvl="2" marL="146685" indent="-146685">
+              <a:spcBef>
+                <a:spcPts val="100"/>
+              </a:spcBef>
+              <a:spcAft>
+                <a:spcPts val="100"/>
+              </a:spcAft>
+              <a:buNone/>
+            </a:pPr>
+            <a:r>
+              <a:rPr sz="700" b="0">
+                <a:solidFill>
+                  <a:srgbClr val="000000"/>
+                </a:solidFill>
+                <a:latin typeface="맑은 고딕"/>
+                <a:ea typeface="맑은 고딕"/>
+              </a:rPr>
+              <a:t>42. </a:t>
+            </a:r>
+            <a:r>
+              <a:rPr sz="700" b="1">
+                <a:solidFill>
+                  <a:srgbClr val="000000"/>
+                </a:solidFill>
+                <a:latin typeface="맑은 고딕"/>
+                <a:ea typeface="맑은 고딕"/>
+              </a:rPr>
+              <a:t>[OpenAI 2025]</a:t>
+            </a:r>
+            <a:r>
+              <a:rPr sz="700" b="0">
+                <a:solidFill>
+                  <a:srgbClr val="000000"/>
+                </a:solidFill>
+                <a:latin typeface="맑은 고딕"/>
+                <a:ea typeface="맑은 고딕"/>
+              </a:rPr>
+              <a:t>  A practical guide to building agents, OpenAI, 2025</a:t>
+            </a:r>
+          </a:p>
+          <a:p>
+            <a:pPr lvl="2" marL="146685" indent="-146685">
+              <a:spcBef>
+                <a:spcPts val="100"/>
+              </a:spcBef>
+              <a:spcAft>
+                <a:spcPts val="100"/>
+              </a:spcAft>
+              <a:buNone/>
+            </a:pPr>
+            <a:r>
+              <a:rPr sz="700" b="0">
+                <a:solidFill>
+                  <a:srgbClr val="000000"/>
+                </a:solidFill>
+                <a:latin typeface="맑은 고딕"/>
+                <a:ea typeface="맑은 고딕"/>
+              </a:rPr>
+              <a:t>43. </a:t>
+            </a:r>
+            <a:r>
+              <a:rPr sz="700" b="1">
+                <a:solidFill>
+                  <a:srgbClr val="000000"/>
+                </a:solidFill>
+                <a:latin typeface="맑은 고딕"/>
+                <a:ea typeface="맑은 고딕"/>
+              </a:rPr>
+              <a:t>[OpenAI: Permissions]</a:t>
+            </a:r>
+            <a:r>
+              <a:rPr sz="700" b="0">
+                <a:solidFill>
+                  <a:srgbClr val="000000"/>
+                </a:solidFill>
+                <a:latin typeface="맑은 고딕"/>
+                <a:ea typeface="맑은 고딕"/>
+              </a:rPr>
+              <a:t>  Permissions, OpenAI, https://learn.chatgpt.com/docs/permissions </a:t>
+            </a:r>
+            <a:r>
+              <a:rPr sz="700" b="0">
+                <a:solidFill>
+                  <a:srgbClr val="000000"/>
+                </a:solidFill>
+                <a:latin typeface="맑은 고딕"/>
+                <a:ea typeface="맑은 고딕"/>
+              </a:rPr>
+              <a:t>(2026-10 확인)</a:t>
+            </a:r>
+            <a:r>
+              <a:rPr sz="700" b="0">
+                <a:solidFill>
+                  <a:srgbClr val="000000"/>
+                </a:solidFill>
+                <a:latin typeface="맑은 고딕"/>
+                <a:ea typeface="맑은 고딕"/>
+              </a:rPr>
+              <a:t> </a:t>
+            </a:r>
+            <a:r>
+              <a:rPr sz="700" b="0">
+                <a:solidFill>
+                  <a:srgbClr val="000000"/>
+                </a:solidFill>
+                <a:latin typeface="맑은 고딕"/>
+                <a:ea typeface="맑은 고딕"/>
+              </a:rPr>
+              <a:t>(읽을거리)</a:t>
+            </a:r>
+          </a:p>
+          <a:p>
+            <a:pPr lvl="2" marL="146685" indent="-146685">
+              <a:spcBef>
+                <a:spcPts val="100"/>
+              </a:spcBef>
+              <a:spcAft>
+                <a:spcPts val="100"/>
+              </a:spcAft>
+              <a:buNone/>
+            </a:pPr>
+            <a:r>
+              <a:rPr sz="700" b="0">
+                <a:solidFill>
+                  <a:srgbClr val="000000"/>
+                </a:solidFill>
+                <a:latin typeface="맑은 고딕"/>
+                <a:ea typeface="맑은 고딕"/>
+              </a:rPr>
+              <a:t>44. </a:t>
+            </a:r>
+            <a:r>
+              <a:rPr sz="700" b="1">
+                <a:solidFill>
+                  <a:srgbClr val="000000"/>
+                </a:solidFill>
+                <a:latin typeface="맑은 고딕"/>
+                <a:ea typeface="맑은 고딕"/>
+              </a:rPr>
+              <a:t>[Osmani 2025]</a:t>
+            </a:r>
+            <a:r>
+              <a:rPr sz="700" b="0">
+                <a:solidFill>
+                  <a:srgbClr val="000000"/>
+                </a:solidFill>
+                <a:latin typeface="맑은 고딕"/>
+                <a:ea typeface="맑은 고딕"/>
+              </a:rPr>
+              <a:t>  The AI-Native Software Engineer, Addy Osmani, 2025, https://addyo.substack.com/p/the-ai-native-software-engineer </a:t>
+            </a:r>
+            <a:r>
+              <a:rPr sz="700" b="0">
+                <a:solidFill>
+                  <a:srgbClr val="000000"/>
+                </a:solidFill>
+                <a:latin typeface="맑은 고딕"/>
+                <a:ea typeface="맑은 고딕"/>
+              </a:rPr>
+              <a:t>(읽을거리)</a:t>
             </a:r>
           </a:p>
         </p:txBody>
@@ -3273,985 +4289,17 @@
           </a:bodyPr>
           <a:lstStyle/>
           <a:p>
-            <a:pPr lvl="2" marL="167640" indent="-167640">
-              <a:spcBef>
-                <a:spcPts val="100"/>
-              </a:spcBef>
-              <a:spcAft>
-                <a:spcPts val="100"/>
-              </a:spcAft>
-              <a:buNone/>
-            </a:pPr>
-            <a:r>
-              <a:rPr sz="800" b="0">
-                <a:solidFill>
-                  <a:srgbClr val="000000"/>
-                </a:solidFill>
-                <a:latin typeface="맑은 고딕"/>
-                <a:ea typeface="맑은 고딕"/>
-              </a:rPr>
-              <a:t>26. </a:t>
-            </a:r>
-            <a:r>
-              <a:rPr sz="800" b="1">
-                <a:solidFill>
-                  <a:srgbClr val="000000"/>
-                </a:solidFill>
-                <a:latin typeface="맑은 고딕"/>
-                <a:ea typeface="맑은 고딕"/>
-              </a:rPr>
-              <a:t>[GitHub Spec Kit]</a:t>
-            </a:r>
-            <a:r>
-              <a:rPr sz="800" b="0">
-                <a:solidFill>
-                  <a:srgbClr val="000000"/>
-                </a:solidFill>
-                <a:latin typeface="맑은 고딕"/>
-                <a:ea typeface="맑은 고딕"/>
-              </a:rPr>
-              <a:t>  Spec Kit, GitHub, https://github.com/github/spec-kit</a:t>
-            </a:r>
-          </a:p>
-          <a:p>
-            <a:pPr lvl="2" marL="167640" indent="-167640">
-              <a:spcBef>
-                <a:spcPts val="100"/>
-              </a:spcBef>
-              <a:spcAft>
-                <a:spcPts val="100"/>
-              </a:spcAft>
-              <a:buNone/>
-            </a:pPr>
-            <a:r>
-              <a:rPr sz="800" b="0">
-                <a:solidFill>
-                  <a:srgbClr val="000000"/>
-                </a:solidFill>
-                <a:latin typeface="맑은 고딕"/>
-                <a:ea typeface="맑은 고딕"/>
-              </a:rPr>
-              <a:t>27. </a:t>
-            </a:r>
-            <a:r>
-              <a:rPr sz="800" b="1">
-                <a:solidFill>
-                  <a:srgbClr val="000000"/>
-                </a:solidFill>
-                <a:latin typeface="맑은 고딕"/>
-                <a:ea typeface="맑은 고딕"/>
-              </a:rPr>
-              <a:t>[Gruber 1993]</a:t>
-            </a:r>
-            <a:r>
-              <a:rPr sz="800" b="0">
-                <a:solidFill>
-                  <a:srgbClr val="000000"/>
-                </a:solidFill>
-                <a:latin typeface="맑은 고딕"/>
-                <a:ea typeface="맑은 고딕"/>
-              </a:rPr>
-              <a:t>  A Translation Approach to Portable Ontology Specifications, Thomas R. Gruber, Knowledge Acquisition 5</a:t>
-            </a:r>
-            <a:r>
-              <a:rPr sz="800" b="0">
-                <a:solidFill>
-                  <a:srgbClr val="000000"/>
-                </a:solidFill>
-                <a:latin typeface="맑은 고딕"/>
-                <a:ea typeface="맑은 고딕"/>
-              </a:rPr>
-              <a:t>(2)</a:t>
-            </a:r>
-            <a:r>
-              <a:rPr sz="800" b="0">
-                <a:solidFill>
-                  <a:srgbClr val="000000"/>
-                </a:solidFill>
-                <a:latin typeface="맑은 고딕"/>
-                <a:ea typeface="맑은 고딕"/>
-              </a:rPr>
-              <a:t>, 1993</a:t>
-            </a:r>
-          </a:p>
-          <a:p>
-            <a:pPr lvl="2" marL="167640" indent="-167640">
-              <a:spcBef>
-                <a:spcPts val="100"/>
-              </a:spcBef>
-              <a:spcAft>
-                <a:spcPts val="100"/>
-              </a:spcAft>
-              <a:buNone/>
-            </a:pPr>
-            <a:r>
-              <a:rPr sz="800" b="0">
-                <a:solidFill>
-                  <a:srgbClr val="000000"/>
-                </a:solidFill>
-                <a:latin typeface="맑은 고딕"/>
-                <a:ea typeface="맑은 고딕"/>
-              </a:rPr>
-              <a:t>28. </a:t>
-            </a:r>
-            <a:r>
-              <a:rPr sz="800" b="1">
-                <a:solidFill>
-                  <a:srgbClr val="000000"/>
-                </a:solidFill>
-                <a:latin typeface="맑은 고딕"/>
-                <a:ea typeface="맑은 고딕"/>
-              </a:rPr>
-              <a:t>[Hassan 외 2026]</a:t>
-            </a:r>
-            <a:r>
-              <a:rPr sz="800" b="0">
-                <a:solidFill>
-                  <a:srgbClr val="000000"/>
-                </a:solidFill>
-                <a:latin typeface="맑은 고딕"/>
-                <a:ea typeface="맑은 고딕"/>
-              </a:rPr>
-              <a:t>  Towards AI-Native Software Engineering </a:t>
-            </a:r>
-            <a:r>
-              <a:rPr sz="800" b="0">
-                <a:solidFill>
-                  <a:srgbClr val="000000"/>
-                </a:solidFill>
-                <a:latin typeface="맑은 고딕"/>
-                <a:ea typeface="맑은 고딕"/>
-              </a:rPr>
-              <a:t>(SE 3.0)</a:t>
-            </a:r>
-            <a:r>
-              <a:rPr sz="800" b="0">
-                <a:solidFill>
-                  <a:srgbClr val="000000"/>
-                </a:solidFill>
-                <a:latin typeface="맑은 고딕"/>
-                <a:ea typeface="맑은 고딕"/>
-              </a:rPr>
-              <a:t> —</a:t>
-            </a:r>
-            <a:r>
-              <a:rPr sz="800" b="0">
-                <a:solidFill>
-                  <a:srgbClr val="000000"/>
-                </a:solidFill>
-                <a:latin typeface="맑은 고딕"/>
-                <a:ea typeface="맑은 고딕"/>
-              </a:rPr>
-              <a:t> A Vision and a Challenge Roadmap, Ahmed E. Hassan·Gustavo A. Oliva·Dayi Lin·Boyuan Chen·Zhen Ming </a:t>
-            </a:r>
-            <a:r>
-              <a:rPr sz="800" b="0">
-                <a:solidFill>
-                  <a:srgbClr val="000000"/>
-                </a:solidFill>
-                <a:latin typeface="맑은 고딕"/>
-                <a:ea typeface="맑은 고딕"/>
-              </a:rPr>
-              <a:t>(Jack)</a:t>
-            </a:r>
-            <a:r>
-              <a:rPr sz="800" b="0">
-                <a:solidFill>
-                  <a:srgbClr val="000000"/>
-                </a:solidFill>
-                <a:latin typeface="맑은 고딕"/>
-                <a:ea typeface="맑은 고딕"/>
-              </a:rPr>
-              <a:t> Jiang, ACM Transactions on Software Engineering and Methodology 35</a:t>
-            </a:r>
-            <a:r>
-              <a:rPr sz="800" b="0">
-                <a:solidFill>
-                  <a:srgbClr val="000000"/>
-                </a:solidFill>
-                <a:latin typeface="맑은 고딕"/>
-                <a:ea typeface="맑은 고딕"/>
-              </a:rPr>
-              <a:t>(9)</a:t>
-            </a:r>
-            <a:r>
-              <a:rPr sz="800" b="0">
-                <a:solidFill>
-                  <a:srgbClr val="000000"/>
-                </a:solidFill>
-                <a:latin typeface="맑은 고딕"/>
-                <a:ea typeface="맑은 고딕"/>
-              </a:rPr>
-              <a:t>, 2026, https://doi.org/10.1145/3807901</a:t>
-            </a:r>
-          </a:p>
-          <a:p>
-            <a:pPr lvl="2" marL="167640" indent="-167640">
-              <a:spcBef>
-                <a:spcPts val="100"/>
-              </a:spcBef>
-              <a:spcAft>
-                <a:spcPts val="100"/>
-              </a:spcAft>
-              <a:buNone/>
-            </a:pPr>
-            <a:r>
-              <a:rPr sz="800" b="0">
-                <a:solidFill>
-                  <a:srgbClr val="000000"/>
-                </a:solidFill>
-                <a:latin typeface="맑은 고딕"/>
-                <a:ea typeface="맑은 고딕"/>
-              </a:rPr>
-              <a:t>29. </a:t>
-            </a:r>
-            <a:r>
-              <a:rPr sz="800" b="1">
-                <a:solidFill>
-                  <a:srgbClr val="000000"/>
-                </a:solidFill>
-                <a:latin typeface="맑은 고딕"/>
-                <a:ea typeface="맑은 고딕"/>
-              </a:rPr>
-              <a:t>[Jeffries 2001]</a:t>
-            </a:r>
-            <a:r>
-              <a:rPr sz="800" b="0">
-                <a:solidFill>
-                  <a:srgbClr val="000000"/>
-                </a:solidFill>
-                <a:latin typeface="맑은 고딕"/>
-                <a:ea typeface="맑은 고딕"/>
-              </a:rPr>
-              <a:t>  Essential XP: Card, Conversation, Confirmation, Ron Jeffries, 2001, https://ronjeffries.com/xprog/articles/expcardconversationconfirmation/</a:t>
-            </a:r>
-          </a:p>
-          <a:p>
-            <a:pPr lvl="2" marL="167640" indent="-167640">
-              <a:spcBef>
-                <a:spcPts val="100"/>
-              </a:spcBef>
-              <a:spcAft>
-                <a:spcPts val="100"/>
-              </a:spcAft>
-              <a:buNone/>
-            </a:pPr>
-            <a:r>
-              <a:rPr sz="800" b="0">
-                <a:solidFill>
-                  <a:srgbClr val="000000"/>
-                </a:solidFill>
-                <a:latin typeface="맑은 고딕"/>
-                <a:ea typeface="맑은 고딕"/>
-              </a:rPr>
-              <a:t>30. </a:t>
-            </a:r>
-            <a:r>
-              <a:rPr sz="800" b="1">
-                <a:solidFill>
-                  <a:srgbClr val="000000"/>
-                </a:solidFill>
-                <a:latin typeface="맑은 고딕"/>
-                <a:ea typeface="맑은 고딕"/>
-              </a:rPr>
-              <a:t>[Karpathy 2025]</a:t>
-            </a:r>
-            <a:r>
-              <a:rPr sz="800" b="0">
-                <a:solidFill>
-                  <a:srgbClr val="000000"/>
-                </a:solidFill>
-                <a:latin typeface="맑은 고딕"/>
-                <a:ea typeface="맑은 고딕"/>
-              </a:rPr>
-              <a:t>  Software Is Changing </a:t>
-            </a:r>
-            <a:r>
-              <a:rPr sz="800" b="0">
-                <a:solidFill>
-                  <a:srgbClr val="000000"/>
-                </a:solidFill>
-                <a:latin typeface="맑은 고딕"/>
-                <a:ea typeface="맑은 고딕"/>
-              </a:rPr>
-              <a:t>(Again)</a:t>
-            </a:r>
-            <a:r>
-              <a:rPr sz="800" b="0">
-                <a:solidFill>
-                  <a:srgbClr val="000000"/>
-                </a:solidFill>
-                <a:latin typeface="맑은 고딕"/>
-                <a:ea typeface="맑은 고딕"/>
-              </a:rPr>
-              <a:t>, Andrej Karpathy, Y Combinator, 2025, https://www.ycombinator.com/library/MW-andrej-karpathy-software-is-changing-again</a:t>
-            </a:r>
-          </a:p>
-          <a:p>
-            <a:pPr lvl="2" marL="167640" indent="-167640">
-              <a:spcBef>
-                <a:spcPts val="100"/>
-              </a:spcBef>
-              <a:spcAft>
-                <a:spcPts val="100"/>
-              </a:spcAft>
-              <a:buNone/>
-            </a:pPr>
-            <a:r>
-              <a:rPr sz="800" b="0">
-                <a:solidFill>
-                  <a:srgbClr val="000000"/>
-                </a:solidFill>
-                <a:latin typeface="맑은 고딕"/>
-                <a:ea typeface="맑은 고딕"/>
-              </a:rPr>
-              <a:t>31. </a:t>
-            </a:r>
-            <a:r>
-              <a:rPr sz="800" b="1">
-                <a:solidFill>
-                  <a:srgbClr val="000000"/>
-                </a:solidFill>
-                <a:latin typeface="맑은 고딕"/>
-                <a:ea typeface="맑은 고딕"/>
-              </a:rPr>
-              <a:t>[Larman 2004]</a:t>
-            </a:r>
-            <a:r>
-              <a:rPr sz="800" b="0">
-                <a:solidFill>
-                  <a:srgbClr val="000000"/>
-                </a:solidFill>
-                <a:latin typeface="맑은 고딕"/>
-                <a:ea typeface="맑은 고딕"/>
-              </a:rPr>
-              <a:t>  Applying UML and Patterns, 3rd ed., Craig Larman, Prentice Hall, 2004</a:t>
-            </a:r>
-          </a:p>
-          <a:p>
-            <a:pPr lvl="2" marL="167640" indent="-167640">
-              <a:spcBef>
-                <a:spcPts val="100"/>
-              </a:spcBef>
-              <a:spcAft>
-                <a:spcPts val="100"/>
-              </a:spcAft>
-              <a:buNone/>
-            </a:pPr>
-            <a:r>
-              <a:rPr sz="800" b="0">
-                <a:solidFill>
-                  <a:srgbClr val="000000"/>
-                </a:solidFill>
-                <a:latin typeface="맑은 고딕"/>
-                <a:ea typeface="맑은 고딕"/>
-              </a:rPr>
-              <a:t>32. </a:t>
-            </a:r>
-            <a:r>
-              <a:rPr sz="800" b="1">
-                <a:solidFill>
-                  <a:srgbClr val="000000"/>
-                </a:solidFill>
-                <a:latin typeface="맑은 고딕"/>
-                <a:ea typeface="맑은 고딕"/>
-              </a:rPr>
-              <a:t>[Lewis·Fowler 2014]</a:t>
-            </a:r>
-            <a:r>
-              <a:rPr sz="800" b="0">
-                <a:solidFill>
-                  <a:srgbClr val="000000"/>
-                </a:solidFill>
-                <a:latin typeface="맑은 고딕"/>
-                <a:ea typeface="맑은 고딕"/>
-              </a:rPr>
-              <a:t>  Microservices, James Lewis·Martin Fowler, martinfowler.com, 2014, https://martinfowler.com/articles/microservices.html</a:t>
-            </a:r>
-          </a:p>
-          <a:p>
-            <a:pPr lvl="2" marL="167640" indent="-167640">
-              <a:spcBef>
-                <a:spcPts val="100"/>
-              </a:spcBef>
-              <a:spcAft>
-                <a:spcPts val="100"/>
-              </a:spcAft>
-              <a:buNone/>
-            </a:pPr>
-            <a:r>
-              <a:rPr sz="800" b="0">
-                <a:solidFill>
-                  <a:srgbClr val="000000"/>
-                </a:solidFill>
-                <a:latin typeface="맑은 고딕"/>
-                <a:ea typeface="맑은 고딕"/>
-              </a:rPr>
-              <a:t>33. </a:t>
-            </a:r>
-            <a:r>
-              <a:rPr sz="800" b="1">
-                <a:solidFill>
-                  <a:srgbClr val="000000"/>
-                </a:solidFill>
-                <a:latin typeface="맑은 고딕"/>
-                <a:ea typeface="맑은 고딕"/>
-              </a:rPr>
-              <a:t>[Lopopolo 2026]</a:t>
-            </a:r>
-            <a:r>
-              <a:rPr sz="800" b="0">
-                <a:solidFill>
-                  <a:srgbClr val="000000"/>
-                </a:solidFill>
-                <a:latin typeface="맑은 고딕"/>
-                <a:ea typeface="맑은 고딕"/>
-              </a:rPr>
-              <a:t>  Harness engineering: leveraging Codex in an agent-first world, Ryan Lopopolo, OpenAI, 2026, https://openai.com/index/harness-engineering/</a:t>
-            </a:r>
-          </a:p>
-          <a:p>
-            <a:pPr lvl="2" marL="167640" indent="-167640">
-              <a:spcBef>
-                <a:spcPts val="100"/>
-              </a:spcBef>
-              <a:spcAft>
-                <a:spcPts val="100"/>
-              </a:spcAft>
-              <a:buNone/>
-            </a:pPr>
-            <a:r>
-              <a:rPr sz="800" b="0">
-                <a:solidFill>
-                  <a:srgbClr val="000000"/>
-                </a:solidFill>
-                <a:latin typeface="맑은 고딕"/>
-                <a:ea typeface="맑은 고딕"/>
-              </a:rPr>
-              <a:t>34. </a:t>
-            </a:r>
-            <a:r>
-              <a:rPr sz="800" b="1">
-                <a:solidFill>
-                  <a:srgbClr val="000000"/>
-                </a:solidFill>
-                <a:latin typeface="맑은 고딕"/>
-                <a:ea typeface="맑은 고딕"/>
-              </a:rPr>
-              <a:t>[Martin 2000]</a:t>
-            </a:r>
-            <a:r>
-              <a:rPr sz="800" b="0">
-                <a:solidFill>
-                  <a:srgbClr val="000000"/>
-                </a:solidFill>
-                <a:latin typeface="맑은 고딕"/>
-                <a:ea typeface="맑은 고딕"/>
-              </a:rPr>
-              <a:t>  Design Principles and Design Patterns, Robert C. Martin, 2000, https://staff.cs.utu.fi/~jounsmed/doos_06/material/DesignPrinciplesAndPatterns.pdf</a:t>
-            </a:r>
-          </a:p>
-          <a:p>
-            <a:pPr lvl="2" marL="167640" indent="-167640">
-              <a:spcBef>
-                <a:spcPts val="100"/>
-              </a:spcBef>
-              <a:spcAft>
-                <a:spcPts val="100"/>
-              </a:spcAft>
-              <a:buNone/>
-            </a:pPr>
-            <a:r>
-              <a:rPr sz="800" b="0">
-                <a:solidFill>
-                  <a:srgbClr val="000000"/>
-                </a:solidFill>
-                <a:latin typeface="맑은 고딕"/>
-                <a:ea typeface="맑은 고딕"/>
-              </a:rPr>
-              <a:t>35. </a:t>
-            </a:r>
-            <a:r>
-              <a:rPr sz="800" b="1">
-                <a:solidFill>
-                  <a:srgbClr val="000000"/>
-                </a:solidFill>
-                <a:latin typeface="맑은 고딕"/>
-                <a:ea typeface="맑은 고딕"/>
-              </a:rPr>
-              <a:t>[Martin 2014]</a:t>
-            </a:r>
-            <a:r>
-              <a:rPr sz="800" b="0">
-                <a:solidFill>
-                  <a:srgbClr val="000000"/>
-                </a:solidFill>
-                <a:latin typeface="맑은 고딕"/>
-                <a:ea typeface="맑은 고딕"/>
-              </a:rPr>
-              <a:t>  The Single Responsibility Principle, Robert C. Martin, The Clean Code Blog, 2014, https://blog.cleancoder.com/uncle-bob/2014/05/08/SingleReponsibilityPrinciple.html</a:t>
-            </a:r>
-          </a:p>
-          <a:p>
-            <a:pPr lvl="2" marL="167640" indent="-167640">
-              <a:spcBef>
-                <a:spcPts val="100"/>
-              </a:spcBef>
-              <a:spcAft>
-                <a:spcPts val="100"/>
-              </a:spcAft>
-              <a:buNone/>
-            </a:pPr>
-            <a:r>
-              <a:rPr sz="800" b="0">
-                <a:solidFill>
-                  <a:srgbClr val="000000"/>
-                </a:solidFill>
-                <a:latin typeface="맑은 고딕"/>
-                <a:ea typeface="맑은 고딕"/>
-              </a:rPr>
-              <a:t>36. </a:t>
-            </a:r>
-            <a:r>
-              <a:rPr sz="800" b="1">
-                <a:solidFill>
-                  <a:srgbClr val="000000"/>
-                </a:solidFill>
-                <a:latin typeface="맑은 고딕"/>
-                <a:ea typeface="맑은 고딕"/>
-              </a:rPr>
-              <a:t>[MCP 2025]</a:t>
-            </a:r>
-            <a:r>
-              <a:rPr sz="800" b="0">
-                <a:solidFill>
-                  <a:srgbClr val="000000"/>
-                </a:solidFill>
-                <a:latin typeface="맑은 고딕"/>
-                <a:ea typeface="맑은 고딕"/>
-              </a:rPr>
-              <a:t>  Model Context Protocol Specification, 2025-06-18, https://modelcontextprotocol.io/specification/2025-06-18</a:t>
-            </a:r>
-          </a:p>
-          <a:p>
-            <a:pPr lvl="2" marL="167640" indent="-167640">
-              <a:spcBef>
-                <a:spcPts val="100"/>
-              </a:spcBef>
-              <a:spcAft>
-                <a:spcPts val="100"/>
-              </a:spcAft>
-              <a:buNone/>
-            </a:pPr>
-            <a:r>
-              <a:rPr sz="800" b="0">
-                <a:solidFill>
-                  <a:srgbClr val="000000"/>
-                </a:solidFill>
-                <a:latin typeface="맑은 고딕"/>
-                <a:ea typeface="맑은 고딕"/>
-              </a:rPr>
-              <a:t>37. </a:t>
-            </a:r>
-            <a:r>
-              <a:rPr sz="800" b="1">
-                <a:solidFill>
-                  <a:srgbClr val="000000"/>
-                </a:solidFill>
-                <a:latin typeface="맑은 고딕"/>
-                <a:ea typeface="맑은 고딕"/>
-              </a:rPr>
-              <a:t>[METR 2025]</a:t>
-            </a:r>
-            <a:r>
-              <a:rPr sz="800" b="0">
-                <a:solidFill>
-                  <a:srgbClr val="000000"/>
-                </a:solidFill>
-                <a:latin typeface="맑은 고딕"/>
-                <a:ea typeface="맑은 고딕"/>
-              </a:rPr>
-              <a:t>  Measuring the Impact of Early-2025 AI on Experienced Open-Source Developer Productivity, METR, 2025, https://metr.org/blog/2025-07-10-early-2025-ai-experienced-os-dev-study/</a:t>
-            </a:r>
-          </a:p>
-        </p:txBody>
-      </p:sp>
-      <p:sp>
-        <p:nvSpPr>
-          <p:cNvPr id="9" name="내용 개체 틀 7">
-            <a:extLst>
-              <a:ext uri="{FF2B5EF4-FFF2-40B4-BE49-F238E27FC236}">
-                <a16:creationId xmlns:a16="http://schemas.microsoft.com/office/drawing/2014/main" id="{BEBA2C4A-B0BF-F2E4-EA6E-614C99CBA184}"/>
-              </a:ext>
-            </a:extLst>
-          </p:cNvPr>
-          <p:cNvSpPr>
-            <a:spLocks noGrp="1"/>
-          </p:cNvSpPr>
-          <p:nvPr>
-            <p:ph idx="1"/>
-          </p:nvPr>
-        </p:nvSpPr>
-        <p:spPr>
-          <a:xfrm>
-            <a:off x="4572000" y="960120"/>
-            <a:ext cx="4439412" cy="5522976"/>
-          </a:xfrm>
-        </p:spPr>
-        <p:txBody>
-          <a:bodyPr>
-            <a:normAutofit/>
-          </a:bodyPr>
-          <a:lstStyle/>
-          <a:p>
-            <a:pPr lvl="2" marL="167640" indent="-167640">
-              <a:spcBef>
-                <a:spcPts val="100"/>
-              </a:spcBef>
-              <a:spcAft>
-                <a:spcPts val="100"/>
-              </a:spcAft>
-              <a:buNone/>
-            </a:pPr>
-            <a:r>
-              <a:rPr sz="800" b="0">
-                <a:solidFill>
-                  <a:srgbClr val="000000"/>
-                </a:solidFill>
-                <a:latin typeface="맑은 고딕"/>
-                <a:ea typeface="맑은 고딕"/>
-              </a:rPr>
-              <a:t>38. </a:t>
-            </a:r>
-            <a:r>
-              <a:rPr sz="800" b="1">
-                <a:solidFill>
-                  <a:srgbClr val="000000"/>
-                </a:solidFill>
-                <a:latin typeface="맑은 고딕"/>
-                <a:ea typeface="맑은 고딕"/>
-              </a:rPr>
-              <a:t>[Meyer 1992]</a:t>
-            </a:r>
-            <a:r>
-              <a:rPr sz="800" b="0">
-                <a:solidFill>
-                  <a:srgbClr val="000000"/>
-                </a:solidFill>
-                <a:latin typeface="맑은 고딕"/>
-                <a:ea typeface="맑은 고딕"/>
-              </a:rPr>
-              <a:t>  Applying "Design by Contract", Bertrand Meyer, IEEE Computer 25</a:t>
-            </a:r>
-            <a:r>
-              <a:rPr sz="800" b="0">
-                <a:solidFill>
-                  <a:srgbClr val="000000"/>
-                </a:solidFill>
-                <a:latin typeface="맑은 고딕"/>
-                <a:ea typeface="맑은 고딕"/>
-              </a:rPr>
-              <a:t>(10)</a:t>
-            </a:r>
-            <a:r>
-              <a:rPr sz="800" b="0">
-                <a:solidFill>
-                  <a:srgbClr val="000000"/>
-                </a:solidFill>
-                <a:latin typeface="맑은 고딕"/>
-                <a:ea typeface="맑은 고딕"/>
-              </a:rPr>
-              <a:t>, 1992, https://se.inf.ethz.ch/~meyer/publications/computer/contract.pdf</a:t>
-            </a:r>
-          </a:p>
-          <a:p>
-            <a:pPr lvl="2" marL="167640" indent="-167640">
-              <a:spcBef>
-                <a:spcPts val="100"/>
-              </a:spcBef>
-              <a:spcAft>
-                <a:spcPts val="100"/>
-              </a:spcAft>
-              <a:buNone/>
-            </a:pPr>
-            <a:r>
-              <a:rPr sz="800" b="0">
-                <a:solidFill>
-                  <a:srgbClr val="000000"/>
-                </a:solidFill>
-                <a:latin typeface="맑은 고딕"/>
-                <a:ea typeface="맑은 고딕"/>
-              </a:rPr>
-              <a:t>39. </a:t>
-            </a:r>
-            <a:r>
-              <a:rPr sz="800" b="1">
-                <a:solidFill>
-                  <a:srgbClr val="000000"/>
-                </a:solidFill>
-                <a:latin typeface="맑은 고딕"/>
-                <a:ea typeface="맑은 고딕"/>
-              </a:rPr>
-              <a:t>[NIST 2023]</a:t>
-            </a:r>
-            <a:r>
-              <a:rPr sz="800" b="0">
-                <a:solidFill>
-                  <a:srgbClr val="000000"/>
-                </a:solidFill>
-                <a:latin typeface="맑은 고딕"/>
-                <a:ea typeface="맑은 고딕"/>
-              </a:rPr>
-              <a:t>  Artificial Intelligence Risk Management Framework </a:t>
-            </a:r>
-            <a:r>
-              <a:rPr sz="800" b="0">
-                <a:solidFill>
-                  <a:srgbClr val="000000"/>
-                </a:solidFill>
-                <a:latin typeface="맑은 고딕"/>
-                <a:ea typeface="맑은 고딕"/>
-              </a:rPr>
-              <a:t>(AI RMF 1.0)</a:t>
-            </a:r>
-            <a:r>
-              <a:rPr sz="800" b="0">
-                <a:solidFill>
-                  <a:srgbClr val="000000"/>
-                </a:solidFill>
-                <a:latin typeface="맑은 고딕"/>
-                <a:ea typeface="맑은 고딕"/>
-              </a:rPr>
-              <a:t>, NIST AI 100-1, National Institute of Standards and Technology, 2023, https://doi.org/10.6028/NIST.AI.100-1</a:t>
-            </a:r>
-          </a:p>
-          <a:p>
-            <a:pPr lvl="2" marL="167640" indent="-167640">
-              <a:spcBef>
-                <a:spcPts val="100"/>
-              </a:spcBef>
-              <a:spcAft>
-                <a:spcPts val="100"/>
-              </a:spcAft>
-              <a:buNone/>
-            </a:pPr>
-            <a:r>
-              <a:rPr sz="800" b="0">
-                <a:solidFill>
-                  <a:srgbClr val="000000"/>
-                </a:solidFill>
-                <a:latin typeface="맑은 고딕"/>
-                <a:ea typeface="맑은 고딕"/>
-              </a:rPr>
-              <a:t>40. </a:t>
-            </a:r>
-            <a:r>
-              <a:rPr sz="800" b="1">
-                <a:solidFill>
-                  <a:srgbClr val="000000"/>
-                </a:solidFill>
-                <a:latin typeface="맑은 고딕"/>
-                <a:ea typeface="맑은 고딕"/>
-              </a:rPr>
-              <a:t>[NIST 2024]</a:t>
-            </a:r>
-            <a:r>
-              <a:rPr sz="800" b="0">
-                <a:solidFill>
-                  <a:srgbClr val="000000"/>
-                </a:solidFill>
-                <a:latin typeface="맑은 고딕"/>
-                <a:ea typeface="맑은 고딕"/>
-              </a:rPr>
-              <a:t>  Artificial Intelligence Risk Management Framework: Generative Artificial Intelligence Profile, NIST AI 600-1, National Institute of Standards and Technology, 2024, https://doi.org/10.6028/NIST.AI.600-1</a:t>
-            </a:r>
-          </a:p>
-          <a:p>
-            <a:pPr lvl="2" marL="167640" indent="-167640">
-              <a:spcBef>
-                <a:spcPts val="100"/>
-              </a:spcBef>
-              <a:spcAft>
-                <a:spcPts val="100"/>
-              </a:spcAft>
-              <a:buNone/>
-            </a:pPr>
-            <a:r>
-              <a:rPr sz="800" b="0">
-                <a:solidFill>
-                  <a:srgbClr val="000000"/>
-                </a:solidFill>
-                <a:latin typeface="맑은 고딕"/>
-                <a:ea typeface="맑은 고딕"/>
-              </a:rPr>
-              <a:t>41. </a:t>
-            </a:r>
-            <a:r>
-              <a:rPr sz="800" b="1">
-                <a:solidFill>
-                  <a:srgbClr val="000000"/>
-                </a:solidFill>
-                <a:latin typeface="맑은 고딕"/>
-                <a:ea typeface="맑은 고딕"/>
-              </a:rPr>
-              <a:t>[North 2006]</a:t>
-            </a:r>
-            <a:r>
-              <a:rPr sz="800" b="0">
-                <a:solidFill>
-                  <a:srgbClr val="000000"/>
-                </a:solidFill>
-                <a:latin typeface="맑은 고딕"/>
-                <a:ea typeface="맑은 고딕"/>
-              </a:rPr>
-              <a:t>  Introducing BDD, Dan North, 2006, https://dannorth.net/blog/introducing-bdd/</a:t>
-            </a:r>
-          </a:p>
-          <a:p>
-            <a:pPr lvl="2" marL="167640" indent="-167640">
-              <a:spcBef>
-                <a:spcPts val="100"/>
-              </a:spcBef>
-              <a:spcAft>
-                <a:spcPts val="100"/>
-              </a:spcAft>
-              <a:buNone/>
-            </a:pPr>
-            <a:r>
-              <a:rPr sz="800" b="0">
-                <a:solidFill>
-                  <a:srgbClr val="000000"/>
-                </a:solidFill>
-                <a:latin typeface="맑은 고딕"/>
-                <a:ea typeface="맑은 고딕"/>
-              </a:rPr>
-              <a:t>42. </a:t>
-            </a:r>
-            <a:r>
-              <a:rPr sz="800" b="1">
-                <a:solidFill>
-                  <a:srgbClr val="000000"/>
-                </a:solidFill>
-                <a:latin typeface="맑은 고딕"/>
-                <a:ea typeface="맑은 고딕"/>
-              </a:rPr>
-              <a:t>[OpenAI 2025]</a:t>
-            </a:r>
-            <a:r>
-              <a:rPr sz="800" b="0">
-                <a:solidFill>
-                  <a:srgbClr val="000000"/>
-                </a:solidFill>
-                <a:latin typeface="맑은 고딕"/>
-                <a:ea typeface="맑은 고딕"/>
-              </a:rPr>
-              <a:t>  A practical guide to building agents, OpenAI, 2025</a:t>
-            </a:r>
-          </a:p>
-          <a:p>
-            <a:pPr lvl="2" marL="167640" indent="-167640">
-              <a:spcBef>
-                <a:spcPts val="100"/>
-              </a:spcBef>
-              <a:spcAft>
-                <a:spcPts val="100"/>
-              </a:spcAft>
-              <a:buNone/>
-            </a:pPr>
-            <a:r>
-              <a:rPr sz="800" b="0">
-                <a:solidFill>
-                  <a:srgbClr val="000000"/>
-                </a:solidFill>
-                <a:latin typeface="맑은 고딕"/>
-                <a:ea typeface="맑은 고딕"/>
-              </a:rPr>
-              <a:t>43. </a:t>
-            </a:r>
-            <a:r>
-              <a:rPr sz="800" b="1">
-                <a:solidFill>
-                  <a:srgbClr val="000000"/>
-                </a:solidFill>
-                <a:latin typeface="맑은 고딕"/>
-                <a:ea typeface="맑은 고딕"/>
-              </a:rPr>
-              <a:t>[OpenAI: Permissions]</a:t>
-            </a:r>
-            <a:r>
-              <a:rPr sz="800" b="0">
-                <a:solidFill>
-                  <a:srgbClr val="000000"/>
-                </a:solidFill>
-                <a:latin typeface="맑은 고딕"/>
-                <a:ea typeface="맑은 고딕"/>
-              </a:rPr>
-              <a:t>  Permissions, OpenAI, https://learn.chatgpt.com/docs/permissions </a:t>
-            </a:r>
-            <a:r>
-              <a:rPr sz="800" b="0">
-                <a:solidFill>
-                  <a:srgbClr val="000000"/>
-                </a:solidFill>
-                <a:latin typeface="맑은 고딕"/>
-                <a:ea typeface="맑은 고딕"/>
-              </a:rPr>
-              <a:t>(2026-10 확인)</a:t>
-            </a:r>
-          </a:p>
-          <a:p>
-            <a:pPr lvl="2" marL="167640" indent="-167640">
-              <a:spcBef>
-                <a:spcPts val="100"/>
-              </a:spcBef>
-              <a:spcAft>
-                <a:spcPts val="100"/>
-              </a:spcAft>
-              <a:buNone/>
-            </a:pPr>
-            <a:r>
-              <a:rPr sz="800" b="0">
-                <a:solidFill>
-                  <a:srgbClr val="000000"/>
-                </a:solidFill>
-                <a:latin typeface="맑은 고딕"/>
-                <a:ea typeface="맑은 고딕"/>
-              </a:rPr>
-              <a:t>44. </a:t>
-            </a:r>
-            <a:r>
-              <a:rPr sz="800" b="1">
-                <a:solidFill>
-                  <a:srgbClr val="000000"/>
-                </a:solidFill>
-                <a:latin typeface="맑은 고딕"/>
-                <a:ea typeface="맑은 고딕"/>
-              </a:rPr>
-              <a:t>[Osmani 2025]</a:t>
-            </a:r>
-            <a:r>
-              <a:rPr sz="800" b="0">
-                <a:solidFill>
-                  <a:srgbClr val="000000"/>
-                </a:solidFill>
-                <a:latin typeface="맑은 고딕"/>
-                <a:ea typeface="맑은 고딕"/>
-              </a:rPr>
-              <a:t>  The AI-Native Software Engineer, Addy Osmani, 2025, https://addyo.substack.com/p/the-ai-native-software-engineer</a:t>
-            </a:r>
-          </a:p>
-          <a:p>
-            <a:pPr lvl="2" marL="167640" indent="-167640">
-              <a:spcBef>
-                <a:spcPts val="100"/>
-              </a:spcBef>
-              <a:spcAft>
-                <a:spcPts val="100"/>
-              </a:spcAft>
-              <a:buNone/>
-            </a:pPr>
-            <a:r>
-              <a:rPr sz="800" b="0">
+            <a:pPr lvl="2" marL="146685" indent="-146685">
+              <a:spcBef>
+                <a:spcPts val="100"/>
+              </a:spcBef>
+              <a:spcAft>
+                <a:spcPts val="100"/>
+              </a:spcAft>
+              <a:buNone/>
+            </a:pPr>
+            <a:r>
+              <a:rPr sz="700" b="0">
                 <a:solidFill>
                   <a:srgbClr val="000000"/>
                 </a:solidFill>
@@ -4261,7 +4309,7 @@
               <a:t>45. </a:t>
             </a:r>
             <a:r>
-              <a:rPr sz="800" b="1">
+              <a:rPr sz="700" b="1">
                 <a:solidFill>
                   <a:srgbClr val="000000"/>
                 </a:solidFill>
@@ -4271,7 +4319,7 @@
               <a:t>[OWASP 2025]</a:t>
             </a:r>
             <a:r>
-              <a:rPr sz="800" b="0">
+              <a:rPr sz="700" b="0">
                 <a:solidFill>
                   <a:srgbClr val="000000"/>
                 </a:solidFill>
@@ -4282,17 +4330,17 @@
             </a:r>
           </a:p>
           <a:p>
-            <a:pPr lvl="2" marL="167640" indent="-167640">
-              <a:spcBef>
-                <a:spcPts val="100"/>
-              </a:spcBef>
-              <a:spcAft>
-                <a:spcPts val="100"/>
-              </a:spcAft>
-              <a:buNone/>
-            </a:pPr>
-            <a:r>
-              <a:rPr sz="800" b="0">
+            <a:pPr lvl="2" marL="146685" indent="-146685">
+              <a:spcBef>
+                <a:spcPts val="100"/>
+              </a:spcBef>
+              <a:spcAft>
+                <a:spcPts val="100"/>
+              </a:spcAft>
+              <a:buNone/>
+            </a:pPr>
+            <a:r>
+              <a:rPr sz="700" b="0">
                 <a:solidFill>
                   <a:srgbClr val="000000"/>
                 </a:solidFill>
@@ -4302,7 +4350,7 @@
               <a:t>46. </a:t>
             </a:r>
             <a:r>
-              <a:rPr sz="800" b="1">
+              <a:rPr sz="700" b="1">
                 <a:solidFill>
                   <a:srgbClr val="000000"/>
                 </a:solidFill>
@@ -4312,7 +4360,7 @@
               <a:t>[Thoughtworks 2026]</a:t>
             </a:r>
             <a:r>
-              <a:rPr sz="800" b="0">
+              <a:rPr sz="700" b="0">
                 <a:solidFill>
                   <a:srgbClr val="000000"/>
                 </a:solidFill>
@@ -4323,17 +4371,17 @@
             </a:r>
           </a:p>
           <a:p>
-            <a:pPr lvl="2" marL="167640" indent="-167640">
-              <a:spcBef>
-                <a:spcPts val="100"/>
-              </a:spcBef>
-              <a:spcAft>
-                <a:spcPts val="100"/>
-              </a:spcAft>
-              <a:buNone/>
-            </a:pPr>
-            <a:r>
-              <a:rPr sz="800" b="0">
+            <a:pPr lvl="2" marL="146685" indent="-146685">
+              <a:spcBef>
+                <a:spcPts val="100"/>
+              </a:spcBef>
+              <a:spcAft>
+                <a:spcPts val="100"/>
+              </a:spcAft>
+              <a:buNone/>
+            </a:pPr>
+            <a:r>
+              <a:rPr sz="700" b="0">
                 <a:solidFill>
                   <a:srgbClr val="000000"/>
                 </a:solidFill>
@@ -4343,7 +4391,7 @@
               <a:t>47. </a:t>
             </a:r>
             <a:r>
-              <a:rPr sz="800" b="1">
+              <a:rPr sz="700" b="1">
                 <a:solidFill>
                   <a:srgbClr val="000000"/>
                 </a:solidFill>
@@ -4353,7 +4401,7 @@
               <a:t>[Wake 2003]</a:t>
             </a:r>
             <a:r>
-              <a:rPr sz="800" b="0">
+              <a:rPr sz="700" b="0">
                 <a:solidFill>
                   <a:srgbClr val="000000"/>
                 </a:solidFill>
@@ -4364,17 +4412,17 @@
             </a:r>
           </a:p>
           <a:p>
-            <a:pPr lvl="2" marL="167640" indent="-167640">
-              <a:spcBef>
-                <a:spcPts val="100"/>
-              </a:spcBef>
-              <a:spcAft>
-                <a:spcPts val="100"/>
-              </a:spcAft>
-              <a:buNone/>
-            </a:pPr>
-            <a:r>
-              <a:rPr sz="800" b="0">
+            <a:pPr lvl="2" marL="146685" indent="-146685">
+              <a:spcBef>
+                <a:spcPts val="100"/>
+              </a:spcBef>
+              <a:spcAft>
+                <a:spcPts val="100"/>
+              </a:spcAft>
+              <a:buNone/>
+            </a:pPr>
+            <a:r>
+              <a:rPr sz="700" b="0">
                 <a:solidFill>
                   <a:srgbClr val="000000"/>
                 </a:solidFill>
@@ -4384,7 +4432,7 @@
               <a:t>48. </a:t>
             </a:r>
             <a:r>
-              <a:rPr sz="800" b="1">
+              <a:rPr sz="700" b="1">
                 <a:solidFill>
                   <a:srgbClr val="000000"/>
                 </a:solidFill>
@@ -4394,7 +4442,7 @@
               <a:t>[Willison 2025a]</a:t>
             </a:r>
             <a:r>
-              <a:rPr sz="800" b="0">
+              <a:rPr sz="700" b="0">
                 <a:solidFill>
                   <a:srgbClr val="000000"/>
                 </a:solidFill>
@@ -4405,17 +4453,17 @@
             </a:r>
           </a:p>
           <a:p>
-            <a:pPr lvl="2" marL="167640" indent="-167640">
-              <a:spcBef>
-                <a:spcPts val="100"/>
-              </a:spcBef>
-              <a:spcAft>
-                <a:spcPts val="100"/>
-              </a:spcAft>
-              <a:buNone/>
-            </a:pPr>
-            <a:r>
-              <a:rPr sz="800" b="0">
+            <a:pPr lvl="2" marL="146685" indent="-146685">
+              <a:spcBef>
+                <a:spcPts val="100"/>
+              </a:spcBef>
+              <a:spcAft>
+                <a:spcPts val="100"/>
+              </a:spcAft>
+              <a:buNone/>
+            </a:pPr>
+            <a:r>
+              <a:rPr sz="700" b="0">
                 <a:solidFill>
                   <a:srgbClr val="000000"/>
                 </a:solidFill>
@@ -4425,7 +4473,7 @@
               <a:t>49. </a:t>
             </a:r>
             <a:r>
-              <a:rPr sz="800" b="1">
+              <a:rPr sz="700" b="1">
                 <a:solidFill>
                   <a:srgbClr val="000000"/>
                 </a:solidFill>
@@ -4435,7 +4483,7 @@
               <a:t>[Willison 2025b]</a:t>
             </a:r>
             <a:r>
-              <a:rPr sz="800" b="0">
+              <a:rPr sz="700" b="0">
                 <a:solidFill>
                   <a:srgbClr val="000000"/>
                 </a:solidFill>
@@ -4446,17 +4494,17 @@
             </a:r>
           </a:p>
           <a:p>
-            <a:pPr lvl="2" marL="167640" indent="-167640">
-              <a:spcBef>
-                <a:spcPts val="100"/>
-              </a:spcBef>
-              <a:spcAft>
-                <a:spcPts val="100"/>
-              </a:spcAft>
-              <a:buNone/>
-            </a:pPr>
-            <a:r>
-              <a:rPr sz="800" b="0">
+            <a:pPr lvl="2" marL="146685" indent="-146685">
+              <a:spcBef>
+                <a:spcPts val="100"/>
+              </a:spcBef>
+              <a:spcAft>
+                <a:spcPts val="100"/>
+              </a:spcAft>
+              <a:buNone/>
+            </a:pPr>
+            <a:r>
+              <a:rPr sz="700" b="0">
                 <a:solidFill>
                   <a:srgbClr val="000000"/>
                 </a:solidFill>
@@ -4466,7 +4514,7 @@
               <a:t>50. </a:t>
             </a:r>
             <a:r>
-              <a:rPr sz="800" b="1">
+              <a:rPr sz="700" b="1">
                 <a:solidFill>
                   <a:srgbClr val="000000"/>
                 </a:solidFill>
@@ -4476,7 +4524,7 @@
               <a:t>[Wirfs-Brock 2006]</a:t>
             </a:r>
             <a:r>
-              <a:rPr sz="800" b="0">
+              <a:rPr sz="700" b="0">
                 <a:solidFill>
                   <a:srgbClr val="000000"/>
                 </a:solidFill>

--- a/courses/ai-native/sessions/references.pptx
+++ b/courses/ai-native/sessions/references.pptx
@@ -3003,17 +3003,7 @@
                 <a:latin typeface="맑은 고딕"/>
                 <a:ea typeface="맑은 고딕"/>
               </a:rPr>
-              <a:t>  LLMs bring new nature of abstraction, Martin Fowler, martinfowler.com, 2025, https://martinfowler.com/articles/2025-nature-abstraction.html </a:t>
-            </a:r>
-            <a:r>
-              <a:rPr sz="700" b="0">
-                <a:solidFill>
-                  <a:srgbClr val="000000"/>
-                </a:solidFill>
-                <a:latin typeface="맑은 고딕"/>
-                <a:ea typeface="맑은 고딕"/>
-              </a:rPr>
-              <a:t>(읽을거리)</a:t>
+              <a:t>  LLMs bring new nature of abstraction, Martin Fowler, martinfowler.com, 2025, https://martinfowler.com/articles/2025-nature-abstraction.html</a:t>
             </a:r>
           </a:p>
           <a:p>
